--- a/review1/2024178011 review-1.pptx
+++ b/review1/2024178011 review-1.pptx
@@ -5,7 +5,7 @@
     <p:sldMasterId id="2147483648" r:id="rId1"/>
   </p:sldMasterIdLst>
   <p:notesMasterIdLst>
-    <p:notesMasterId r:id="rId22"/>
+    <p:notesMasterId r:id="rId23"/>
   </p:notesMasterIdLst>
   <p:sldIdLst>
     <p:sldId id="257" r:id="rId2"/>
@@ -15,19 +15,20 @@
     <p:sldId id="272" r:id="rId6"/>
     <p:sldId id="273" r:id="rId7"/>
     <p:sldId id="258" r:id="rId8"/>
-    <p:sldId id="274" r:id="rId9"/>
-    <p:sldId id="275" r:id="rId10"/>
-    <p:sldId id="277" r:id="rId11"/>
-    <p:sldId id="278" r:id="rId12"/>
-    <p:sldId id="279" r:id="rId13"/>
-    <p:sldId id="280" r:id="rId14"/>
-    <p:sldId id="281" r:id="rId15"/>
-    <p:sldId id="282" r:id="rId16"/>
-    <p:sldId id="283" r:id="rId17"/>
-    <p:sldId id="284" r:id="rId18"/>
-    <p:sldId id="285" r:id="rId19"/>
-    <p:sldId id="286" r:id="rId20"/>
-    <p:sldId id="287" r:id="rId21"/>
+    <p:sldId id="288" r:id="rId9"/>
+    <p:sldId id="274" r:id="rId10"/>
+    <p:sldId id="275" r:id="rId11"/>
+    <p:sldId id="277" r:id="rId12"/>
+    <p:sldId id="278" r:id="rId13"/>
+    <p:sldId id="279" r:id="rId14"/>
+    <p:sldId id="280" r:id="rId15"/>
+    <p:sldId id="281" r:id="rId16"/>
+    <p:sldId id="282" r:id="rId17"/>
+    <p:sldId id="283" r:id="rId18"/>
+    <p:sldId id="284" r:id="rId19"/>
+    <p:sldId id="285" r:id="rId20"/>
+    <p:sldId id="286" r:id="rId21"/>
+    <p:sldId id="287" r:id="rId22"/>
   </p:sldIdLst>
   <p:sldSz cx="12192000" cy="6858000"/>
   <p:notesSz cx="6858000" cy="9144000"/>
@@ -216,7 +217,7 @@
           <a:p>
             <a:fld id="{94B322E9-8FCB-4E36-92B9-AAA94F993B43}" type="datetimeFigureOut">
               <a:rPr lang="en-IN" smtClean="0"/>
-              <a:t>23-01-2026</a:t>
+              <a:t>24-01-2026</a:t>
             </a:fld>
             <a:endParaRPr lang="en-IN"/>
           </a:p>
@@ -1123,7 +1124,7 @@
           <a:p>
             <a:fld id="{A8C48ACE-AE27-47B1-B7D4-7EF694A9D53C}" type="datetimeFigureOut">
               <a:rPr lang="en-IN" smtClean="0"/>
-              <a:t>23-01-2026</a:t>
+              <a:t>24-01-2026</a:t>
             </a:fld>
             <a:endParaRPr lang="en-IN"/>
           </a:p>
@@ -1323,7 +1324,7 @@
           <a:p>
             <a:fld id="{A8C48ACE-AE27-47B1-B7D4-7EF694A9D53C}" type="datetimeFigureOut">
               <a:rPr lang="en-IN" smtClean="0"/>
-              <a:t>23-01-2026</a:t>
+              <a:t>24-01-2026</a:t>
             </a:fld>
             <a:endParaRPr lang="en-IN"/>
           </a:p>
@@ -1533,7 +1534,7 @@
           <a:p>
             <a:fld id="{A8C48ACE-AE27-47B1-B7D4-7EF694A9D53C}" type="datetimeFigureOut">
               <a:rPr lang="en-IN" smtClean="0"/>
-              <a:t>23-01-2026</a:t>
+              <a:t>24-01-2026</a:t>
             </a:fld>
             <a:endParaRPr lang="en-IN"/>
           </a:p>
@@ -1733,7 +1734,7 @@
           <a:p>
             <a:fld id="{A8C48ACE-AE27-47B1-B7D4-7EF694A9D53C}" type="datetimeFigureOut">
               <a:rPr lang="en-IN" smtClean="0"/>
-              <a:t>23-01-2026</a:t>
+              <a:t>24-01-2026</a:t>
             </a:fld>
             <a:endParaRPr lang="en-IN"/>
           </a:p>
@@ -2009,7 +2010,7 @@
           <a:p>
             <a:fld id="{A8C48ACE-AE27-47B1-B7D4-7EF694A9D53C}" type="datetimeFigureOut">
               <a:rPr lang="en-IN" smtClean="0"/>
-              <a:t>23-01-2026</a:t>
+              <a:t>24-01-2026</a:t>
             </a:fld>
             <a:endParaRPr lang="en-IN"/>
           </a:p>
@@ -2277,7 +2278,7 @@
           <a:p>
             <a:fld id="{A8C48ACE-AE27-47B1-B7D4-7EF694A9D53C}" type="datetimeFigureOut">
               <a:rPr lang="en-IN" smtClean="0"/>
-              <a:t>23-01-2026</a:t>
+              <a:t>24-01-2026</a:t>
             </a:fld>
             <a:endParaRPr lang="en-IN"/>
           </a:p>
@@ -2692,7 +2693,7 @@
           <a:p>
             <a:fld id="{A8C48ACE-AE27-47B1-B7D4-7EF694A9D53C}" type="datetimeFigureOut">
               <a:rPr lang="en-IN" smtClean="0"/>
-              <a:t>23-01-2026</a:t>
+              <a:t>24-01-2026</a:t>
             </a:fld>
             <a:endParaRPr lang="en-IN"/>
           </a:p>
@@ -2834,7 +2835,7 @@
           <a:p>
             <a:fld id="{A8C48ACE-AE27-47B1-B7D4-7EF694A9D53C}" type="datetimeFigureOut">
               <a:rPr lang="en-IN" smtClean="0"/>
-              <a:t>23-01-2026</a:t>
+              <a:t>24-01-2026</a:t>
             </a:fld>
             <a:endParaRPr lang="en-IN"/>
           </a:p>
@@ -2947,7 +2948,7 @@
           <a:p>
             <a:fld id="{A8C48ACE-AE27-47B1-B7D4-7EF694A9D53C}" type="datetimeFigureOut">
               <a:rPr lang="en-IN" smtClean="0"/>
-              <a:t>23-01-2026</a:t>
+              <a:t>24-01-2026</a:t>
             </a:fld>
             <a:endParaRPr lang="en-IN"/>
           </a:p>
@@ -3260,7 +3261,7 @@
           <a:p>
             <a:fld id="{A8C48ACE-AE27-47B1-B7D4-7EF694A9D53C}" type="datetimeFigureOut">
               <a:rPr lang="en-IN" smtClean="0"/>
-              <a:t>23-01-2026</a:t>
+              <a:t>24-01-2026</a:t>
             </a:fld>
             <a:endParaRPr lang="en-IN"/>
           </a:p>
@@ -3549,7 +3550,7 @@
           <a:p>
             <a:fld id="{A8C48ACE-AE27-47B1-B7D4-7EF694A9D53C}" type="datetimeFigureOut">
               <a:rPr lang="en-IN" smtClean="0"/>
-              <a:t>23-01-2026</a:t>
+              <a:t>24-01-2026</a:t>
             </a:fld>
             <a:endParaRPr lang="en-IN"/>
           </a:p>
@@ -3792,7 +3793,7 @@
           <a:p>
             <a:fld id="{A8C48ACE-AE27-47B1-B7D4-7EF694A9D53C}" type="datetimeFigureOut">
               <a:rPr lang="en-IN" smtClean="0"/>
-              <a:t>23-01-2026</a:t>
+              <a:t>24-01-2026</a:t>
             </a:fld>
             <a:endParaRPr lang="en-IN"/>
           </a:p>
@@ -4507,7 +4508,7 @@
           <p:cNvPr id="2" name="Title 1">
             <a:extLst>
               <a:ext uri="{FF2B5EF4-FFF2-40B4-BE49-F238E27FC236}">
-                <a16:creationId xmlns:a16="http://schemas.microsoft.com/office/drawing/2014/main" id="{0DA6F9E9-F79B-47A3-0E73-B441DC82A898}"/>
+                <a16:creationId xmlns:a16="http://schemas.microsoft.com/office/drawing/2014/main" id="{D8EDB180-F318-6BD9-DCBE-BE44604AB8C0}"/>
               </a:ext>
             </a:extLst>
           </p:cNvPr>
@@ -4525,7 +4526,7 @@
           <a:p>
             <a:r>
               <a:rPr lang="en-US" dirty="0"/>
-              <a:t>6B – Algorithm Details</a:t>
+              <a:t>6A – Module Overview &amp; Block Diagram</a:t>
             </a:r>
             <a:endParaRPr lang="en-IN" dirty="0"/>
           </a:p>
@@ -4536,7 +4537,7 @@
           <p:cNvPr id="3" name="Content Placeholder 2">
             <a:extLst>
               <a:ext uri="{FF2B5EF4-FFF2-40B4-BE49-F238E27FC236}">
-                <a16:creationId xmlns:a16="http://schemas.microsoft.com/office/drawing/2014/main" id="{D157C188-BD44-6F47-D1EC-D63BA16E3A9B}"/>
+                <a16:creationId xmlns:a16="http://schemas.microsoft.com/office/drawing/2014/main" id="{933BB3F7-04E5-492E-A91D-78AE0436D5A3}"/>
               </a:ext>
             </a:extLst>
           </p:cNvPr>
@@ -4549,162 +4550,80 @@
         </p:nvSpPr>
         <p:spPr/>
         <p:txBody>
-          <a:bodyPr>
-            <a:normAutofit lnSpcReduction="10000"/>
-          </a:bodyPr>
+          <a:bodyPr/>
           <a:lstStyle/>
           <a:p>
             <a:r>
               <a:rPr lang="en-US" b="1" dirty="0"/>
-              <a:t>Algorithms Used</a:t>
+              <a:t>Module:</a:t>
             </a:r>
           </a:p>
           <a:p>
             <a:pPr lvl="1"/>
             <a:r>
               <a:rPr lang="en-US" b="1" dirty="0"/>
-              <a:t>YOLOv8 – Object Detection</a:t>
-            </a:r>
-          </a:p>
-          <a:p>
-            <a:pPr lvl="2"/>
+              <a:t>YOLO-Based Person Detection and Tracking</a:t>
+            </a:r>
+            <a:endParaRPr lang="en-US" dirty="0"/>
+          </a:p>
+          <a:p>
             <a:r>
               <a:rPr lang="en-US" b="1" dirty="0"/>
-              <a:t>Role: </a:t>
-            </a:r>
+              <a:t>Purpose: </a:t>
+            </a:r>
+          </a:p>
+          <a:p>
+            <a:pPr lvl="1"/>
             <a:r>
               <a:rPr lang="en-US" dirty="0"/>
-              <a:t>Detect all human instances in each frame.</a:t>
-            </a:r>
-            <a:endParaRPr lang="en-US" b="1" dirty="0"/>
-          </a:p>
-          <a:p>
-            <a:pPr lvl="2"/>
-            <a:r>
-              <a:rPr lang="en-IN" b="1" dirty="0"/>
-              <a:t>Result:</a:t>
-            </a:r>
-            <a:r>
-              <a:rPr lang="en-IN" dirty="0"/>
-              <a:t> B = { (x1, y1, x2, y2, confidence, class=person) }</a:t>
-            </a:r>
-            <a:endParaRPr lang="en-US" dirty="0"/>
-          </a:p>
-          <a:p>
-            <a:pPr lvl="1"/>
-            <a:r>
-              <a:rPr lang="en-US" b="1" dirty="0" err="1"/>
-              <a:t>ByteTrack</a:t>
-            </a:r>
-            <a:r>
-              <a:rPr lang="en-US" b="1" dirty="0"/>
-              <a:t> – Multi-object Tracking</a:t>
-            </a:r>
-          </a:p>
-          <a:p>
-            <a:pPr lvl="2"/>
-            <a:r>
-              <a:rPr lang="en-US" b="1" dirty="0"/>
-              <a:t>Role: </a:t>
-            </a:r>
-            <a:r>
-              <a:rPr lang="en-US" dirty="0"/>
-              <a:t>Assign persistent IDs to detected persons across frames.</a:t>
-            </a:r>
-          </a:p>
-          <a:p>
-            <a:pPr lvl="2"/>
-            <a:r>
-              <a:rPr lang="en-US" b="1" dirty="0"/>
-              <a:t>Result:</a:t>
-            </a:r>
-            <a:r>
-              <a:rPr lang="en-US" dirty="0"/>
-              <a:t> Track ID → Sequence of bounding boxes over time</a:t>
-            </a:r>
-          </a:p>
-          <a:p>
-            <a:pPr lvl="1"/>
-            <a:r>
-              <a:rPr lang="en-US" b="1" dirty="0"/>
-              <a:t>Motion-Based Raider Selection (Heuristic) “</a:t>
-            </a:r>
-            <a:r>
-              <a:rPr lang="en-IN" dirty="0"/>
-              <a:t>Cumulative Displacement Heuristic</a:t>
-            </a:r>
-            <a:r>
-              <a:rPr lang="en-US" b="1" dirty="0"/>
-              <a:t>”</a:t>
-            </a:r>
-          </a:p>
-          <a:p>
-            <a:pPr lvl="1"/>
-            <a:r>
-              <a:rPr lang="en-IN" b="1" dirty="0"/>
-              <a:t>Formula: </a:t>
-            </a:r>
-          </a:p>
-          <a:p>
-            <a:pPr marL="457200" lvl="1" indent="0">
-              <a:buNone/>
-            </a:pPr>
-            <a:r>
-              <a:rPr lang="en-IN" dirty="0"/>
-              <a:t>		</a:t>
-            </a:r>
-            <a:r>
-              <a:rPr lang="en-IN" dirty="0" err="1"/>
-              <a:t>motion_i</a:t>
-            </a:r>
-            <a:r>
-              <a:rPr lang="en-IN" dirty="0"/>
-              <a:t> = </a:t>
-            </a:r>
-            <a:r>
-              <a:rPr lang="el-GR" dirty="0"/>
-              <a:t>Σ || </a:t>
-            </a:r>
-            <a:r>
-              <a:rPr lang="en-IN" dirty="0" err="1"/>
-              <a:t>position_t</a:t>
-            </a:r>
-            <a:r>
-              <a:rPr lang="en-IN" dirty="0"/>
-              <a:t> − position_(t−1) ||</a:t>
-            </a:r>
-          </a:p>
-          <a:p>
-            <a:pPr marL="457200" lvl="1" indent="0">
-              <a:buNone/>
-            </a:pPr>
-            <a:r>
-              <a:rPr lang="en-IN" dirty="0"/>
-              <a:t>		raider = argmax(</a:t>
-            </a:r>
-            <a:r>
-              <a:rPr lang="en-IN" dirty="0" err="1"/>
-              <a:t>motion_i</a:t>
-            </a:r>
-            <a:r>
-              <a:rPr lang="en-IN" dirty="0"/>
-              <a:t>)</a:t>
-            </a:r>
-          </a:p>
-          <a:p>
-            <a:pPr lvl="2"/>
-            <a:endParaRPr lang="en-IN" b="1" dirty="0"/>
-          </a:p>
-          <a:p>
-            <a:pPr lvl="2"/>
-            <a:endParaRPr lang="en-US" dirty="0"/>
+              <a:t>tracks the active Kabaddi player (raider) from raw multi-person video.</a:t>
+            </a:r>
+          </a:p>
+          <a:p>
+            <a:endParaRPr lang="en-IN" dirty="0"/>
           </a:p>
         </p:txBody>
       </p:sp>
+      <p:pic>
+        <p:nvPicPr>
+          <p:cNvPr id="16" name="Picture 15">
+            <a:extLst>
+              <a:ext uri="{FF2B5EF4-FFF2-40B4-BE49-F238E27FC236}">
+                <a16:creationId xmlns:a16="http://schemas.microsoft.com/office/drawing/2014/main" id="{8A3EDEF0-D8DE-3318-119E-A7038743EC18}"/>
+              </a:ext>
+            </a:extLst>
+          </p:cNvPr>
+          <p:cNvPicPr>
+            <a:picLocks noChangeAspect="1"/>
+          </p:cNvPicPr>
+          <p:nvPr/>
+        </p:nvPicPr>
+        <p:blipFill>
+          <a:blip r:embed="rId2">
+            <a:extLst>
+              <a:ext uri="{28A0092B-C50C-407E-A947-70E740481C1C}">
+                <a14:useLocalDpi xmlns:a14="http://schemas.microsoft.com/office/drawing/2010/main" val="0"/>
+              </a:ext>
+            </a:extLst>
+          </a:blip>
+          <a:stretch>
+            <a:fillRect/>
+          </a:stretch>
+        </p:blipFill>
+        <p:spPr>
+          <a:xfrm>
+            <a:off x="233362" y="4576348"/>
+            <a:ext cx="11725275" cy="885825"/>
+          </a:xfrm>
+          <a:prstGeom prst="rect">
+            <a:avLst/>
+          </a:prstGeom>
+        </p:spPr>
+      </p:pic>
     </p:spTree>
     <p:extLst>
       <p:ext uri="{BB962C8B-B14F-4D97-AF65-F5344CB8AC3E}">
-        <p14:creationId xmlns:p14="http://schemas.microsoft.com/office/powerpoint/2010/main" val="3038518211"/>
+        <p14:creationId xmlns:p14="http://schemas.microsoft.com/office/powerpoint/2010/main" val="588382975"/>
       </p:ext>
     </p:extLst>
   </p:cSld>
@@ -4736,7 +4655,7 @@
           <p:cNvPr id="2" name="Title 1">
             <a:extLst>
               <a:ext uri="{FF2B5EF4-FFF2-40B4-BE49-F238E27FC236}">
-                <a16:creationId xmlns:a16="http://schemas.microsoft.com/office/drawing/2014/main" id="{BD871005-28F4-33B1-CB9C-7B6F6000B62D}"/>
+                <a16:creationId xmlns:a16="http://schemas.microsoft.com/office/drawing/2014/main" id="{0DA6F9E9-F79B-47A3-0E73-B441DC82A898}"/>
               </a:ext>
             </a:extLst>
           </p:cNvPr>
@@ -4754,7 +4673,7 @@
           <a:p>
             <a:r>
               <a:rPr lang="en-US" dirty="0"/>
-              <a:t>6A – Algorithm Details cont.</a:t>
+              <a:t>6B – Algorithm Details</a:t>
             </a:r>
             <a:endParaRPr lang="en-IN" dirty="0"/>
           </a:p>
@@ -4765,7 +4684,7 @@
           <p:cNvPr id="3" name="Content Placeholder 2">
             <a:extLst>
               <a:ext uri="{FF2B5EF4-FFF2-40B4-BE49-F238E27FC236}">
-                <a16:creationId xmlns:a16="http://schemas.microsoft.com/office/drawing/2014/main" id="{06FC5F17-52F6-DADC-542A-B0EEE9B1FC07}"/>
+                <a16:creationId xmlns:a16="http://schemas.microsoft.com/office/drawing/2014/main" id="{D157C188-BD44-6F47-D1EC-D63BA16E3A9B}"/>
               </a:ext>
             </a:extLst>
           </p:cNvPr>
@@ -4779,149 +4698,161 @@
         <p:spPr/>
         <p:txBody>
           <a:bodyPr>
-            <a:normAutofit fontScale="62500" lnSpcReduction="20000"/>
+            <a:normAutofit lnSpcReduction="10000"/>
           </a:bodyPr>
           <a:lstStyle/>
           <a:p>
-            <a:pPr marL="0" indent="0">
+            <a:r>
+              <a:rPr lang="en-US" b="1" dirty="0"/>
+              <a:t>Algorithms Used</a:t>
+            </a:r>
+          </a:p>
+          <a:p>
+            <a:pPr lvl="1"/>
+            <a:r>
+              <a:rPr lang="en-US" b="1" dirty="0"/>
+              <a:t>YOLOv8 – Object Detection</a:t>
+            </a:r>
+          </a:p>
+          <a:p>
+            <a:pPr lvl="2"/>
+            <a:r>
+              <a:rPr lang="en-US" b="1" dirty="0"/>
+              <a:t>Role: </a:t>
+            </a:r>
+            <a:r>
+              <a:rPr lang="en-US" dirty="0"/>
+              <a:t>Detect all human instances in each frame.</a:t>
+            </a:r>
+            <a:endParaRPr lang="en-US" b="1" dirty="0"/>
+          </a:p>
+          <a:p>
+            <a:pPr lvl="2"/>
+            <a:r>
+              <a:rPr lang="en-IN" b="1" dirty="0"/>
+              <a:t>Result:</a:t>
+            </a:r>
+            <a:r>
+              <a:rPr lang="en-IN" dirty="0"/>
+              <a:t> B = { (x1, y1, x2, y2, confidence, class=person) }</a:t>
+            </a:r>
+            <a:endParaRPr lang="en-US" dirty="0"/>
+          </a:p>
+          <a:p>
+            <a:pPr lvl="1"/>
+            <a:r>
+              <a:rPr lang="en-US" b="1" dirty="0" err="1"/>
+              <a:t>ByteTrack</a:t>
+            </a:r>
+            <a:r>
+              <a:rPr lang="en-US" b="1" dirty="0"/>
+              <a:t> – Multi-object Tracking</a:t>
+            </a:r>
+          </a:p>
+          <a:p>
+            <a:pPr lvl="2"/>
+            <a:r>
+              <a:rPr lang="en-US" b="1" dirty="0"/>
+              <a:t>Role: </a:t>
+            </a:r>
+            <a:r>
+              <a:rPr lang="en-US" dirty="0"/>
+              <a:t>Assign persistent IDs to detected persons across frames.</a:t>
+            </a:r>
+          </a:p>
+          <a:p>
+            <a:pPr lvl="2"/>
+            <a:r>
+              <a:rPr lang="en-US" b="1" dirty="0"/>
+              <a:t>Result:</a:t>
+            </a:r>
+            <a:r>
+              <a:rPr lang="en-US" dirty="0"/>
+              <a:t> Track ID → Sequence of bounding boxes over time</a:t>
+            </a:r>
+          </a:p>
+          <a:p>
+            <a:pPr lvl="1"/>
+            <a:r>
+              <a:rPr lang="en-US" b="1" dirty="0"/>
+              <a:t>Motion-Based Raider Selection (Heuristic) “</a:t>
+            </a:r>
+            <a:r>
+              <a:rPr lang="en-IN" dirty="0"/>
+              <a:t>Cumulative Displacement Heuristic</a:t>
+            </a:r>
+            <a:r>
+              <a:rPr lang="en-US" b="1" dirty="0"/>
+              <a:t>”</a:t>
+            </a:r>
+          </a:p>
+          <a:p>
+            <a:pPr lvl="1"/>
+            <a:r>
+              <a:rPr lang="en-IN" b="1" dirty="0"/>
+              <a:t>Formula: </a:t>
+            </a:r>
+          </a:p>
+          <a:p>
+            <a:pPr marL="457200" lvl="1" indent="0">
               <a:buNone/>
             </a:pPr>
             <a:r>
-              <a:rPr lang="es-ES" b="1" dirty="0"/>
-              <a:t>Final OUTPUT:</a:t>
-            </a:r>
-            <a:endParaRPr lang="es-ES" dirty="0"/>
-          </a:p>
-          <a:p>
-            <a:pPr marL="0" indent="0">
+              <a:rPr lang="en-IN" dirty="0"/>
+              <a:t>		</a:t>
+            </a:r>
+            <a:r>
+              <a:rPr lang="en-IN" dirty="0" err="1"/>
+              <a:t>motion_i</a:t>
+            </a:r>
+            <a:r>
+              <a:rPr lang="en-IN" dirty="0"/>
+              <a:t> = </a:t>
+            </a:r>
+            <a:r>
+              <a:rPr lang="el-GR" dirty="0"/>
+              <a:t>Σ || </a:t>
+            </a:r>
+            <a:r>
+              <a:rPr lang="en-IN" dirty="0" err="1"/>
+              <a:t>position_t</a:t>
+            </a:r>
+            <a:r>
+              <a:rPr lang="en-IN" dirty="0"/>
+              <a:t> − position_(t−1) ||</a:t>
+            </a:r>
+          </a:p>
+          <a:p>
+            <a:pPr marL="457200" lvl="1" indent="0">
               <a:buNone/>
             </a:pPr>
             <a:r>
-              <a:rPr lang="es-ES" sz="2300" dirty="0" err="1"/>
-              <a:t>Raider_BBoxes</a:t>
-            </a:r>
-            <a:r>
-              <a:rPr lang="es-ES" sz="2300" dirty="0"/>
-              <a:t> = {</a:t>
-            </a:r>
-          </a:p>
-          <a:p>
-            <a:pPr marL="0" indent="0">
-              <a:buNone/>
-            </a:pPr>
-            <a:r>
-              <a:rPr lang="es-ES" sz="2300" dirty="0"/>
-              <a:t>  frame_1: (x1, y1, x2, y2),</a:t>
-            </a:r>
-          </a:p>
-          <a:p>
-            <a:pPr marL="0" indent="0">
-              <a:buNone/>
-            </a:pPr>
-            <a:r>
-              <a:rPr lang="es-ES" sz="2300" dirty="0"/>
-              <a:t>  frame_2: (x1, y1, x2, y2),</a:t>
-            </a:r>
-          </a:p>
-          <a:p>
-            <a:pPr marL="0" indent="0">
-              <a:buNone/>
-            </a:pPr>
-            <a:r>
-              <a:rPr lang="es-ES" sz="2300" dirty="0"/>
-              <a:t>  ...</a:t>
-            </a:r>
-          </a:p>
-          <a:p>
-            <a:pPr marL="0" indent="0">
-              <a:buNone/>
-            </a:pPr>
-            <a:r>
-              <a:rPr lang="es-ES" sz="2300" dirty="0"/>
-              <a:t>}</a:t>
-            </a:r>
-          </a:p>
-          <a:p>
-            <a:pPr marL="0" indent="0">
-              <a:buNone/>
-            </a:pPr>
-            <a:endParaRPr lang="en-IN" dirty="0"/>
-          </a:p>
-          <a:p>
-            <a:pPr marL="0" indent="0">
-              <a:buNone/>
-            </a:pPr>
-            <a:r>
               <a:rPr lang="en-IN" dirty="0"/>
-              <a:t>Sample I/P, O/P:</a:t>
-            </a:r>
-          </a:p>
-          <a:p>
-            <a:pPr marL="0" indent="0">
-              <a:buNone/>
-            </a:pPr>
-            <a:r>
-              <a:rPr lang="en-US" dirty="0"/>
-              <a:t>	Sample Input: raw video with 5–7 players visible</a:t>
-            </a:r>
-          </a:p>
-          <a:p>
-            <a:pPr marL="0" indent="0">
-              <a:buNone/>
-            </a:pPr>
-            <a:r>
-              <a:rPr lang="en-US" dirty="0"/>
-              <a:t>	</a:t>
-            </a:r>
-          </a:p>
-          <a:p>
-            <a:pPr marL="0" indent="0">
-              <a:buNone/>
-            </a:pPr>
-            <a:r>
-              <a:rPr lang="en-US" dirty="0"/>
-              <a:t>Sample Output (video with annotations)</a:t>
-            </a:r>
-          </a:p>
-          <a:p>
-            <a:pPr marL="0" indent="0">
-              <a:buNone/>
-            </a:pPr>
-            <a:r>
-              <a:rPr lang="en-US" dirty="0"/>
-              <a:t>	Frame 45:</a:t>
-            </a:r>
-          </a:p>
-          <a:p>
-            <a:pPr marL="0" indent="0">
-              <a:buNone/>
-            </a:pPr>
-            <a:r>
-              <a:rPr lang="en-US" dirty="0"/>
-              <a:t>	Raider ID = 3</a:t>
-            </a:r>
-          </a:p>
-          <a:p>
-            <a:pPr marL="0" indent="0">
-              <a:buNone/>
-            </a:pPr>
-            <a:r>
-              <a:rPr lang="en-US" dirty="0"/>
-              <a:t>	Bounding Box = (420, 180, 610, 520)</a:t>
-            </a:r>
-          </a:p>
-          <a:p>
-            <a:pPr marL="0" indent="0">
-              <a:buNone/>
-            </a:pPr>
-            <a:endParaRPr lang="en-IN" dirty="0"/>
+              <a:t>		raider = argmax(</a:t>
+            </a:r>
+            <a:r>
+              <a:rPr lang="en-IN" dirty="0" err="1"/>
+              <a:t>motion_i</a:t>
+            </a:r>
+            <a:r>
+              <a:rPr lang="en-IN" dirty="0"/>
+              <a:t>)</a:t>
+            </a:r>
+          </a:p>
+          <a:p>
+            <a:pPr lvl="2"/>
+            <a:endParaRPr lang="en-IN" b="1" dirty="0"/>
+          </a:p>
+          <a:p>
+            <a:pPr lvl="2"/>
+            <a:endParaRPr lang="en-US" dirty="0"/>
           </a:p>
         </p:txBody>
       </p:sp>
     </p:spTree>
     <p:extLst>
       <p:ext uri="{BB962C8B-B14F-4D97-AF65-F5344CB8AC3E}">
-        <p14:creationId xmlns:p14="http://schemas.microsoft.com/office/powerpoint/2010/main" val="1447314762"/>
+        <p14:creationId xmlns:p14="http://schemas.microsoft.com/office/powerpoint/2010/main" val="3038518211"/>
       </p:ext>
     </p:extLst>
   </p:cSld>
@@ -4953,7 +4884,7 @@
           <p:cNvPr id="2" name="Title 1">
             <a:extLst>
               <a:ext uri="{FF2B5EF4-FFF2-40B4-BE49-F238E27FC236}">
-                <a16:creationId xmlns:a16="http://schemas.microsoft.com/office/drawing/2014/main" id="{6CEEFE54-CD71-B1B9-E3FA-37100C9AB3AB}"/>
+                <a16:creationId xmlns:a16="http://schemas.microsoft.com/office/drawing/2014/main" id="{BD871005-28F4-33B1-CB9C-7B6F6000B62D}"/>
               </a:ext>
             </a:extLst>
           </p:cNvPr>
@@ -4971,7 +4902,7 @@
           <a:p>
             <a:r>
               <a:rPr lang="en-US" dirty="0"/>
-              <a:t>7A – Module Overview &amp; Block Diagram</a:t>
+              <a:t>6A – Algorithm Details cont.</a:t>
             </a:r>
             <a:endParaRPr lang="en-IN" dirty="0"/>
           </a:p>
@@ -4982,7 +4913,7 @@
           <p:cNvPr id="3" name="Content Placeholder 2">
             <a:extLst>
               <a:ext uri="{FF2B5EF4-FFF2-40B4-BE49-F238E27FC236}">
-                <a16:creationId xmlns:a16="http://schemas.microsoft.com/office/drawing/2014/main" id="{4665AFA0-3BE0-6961-BDD5-25E884B53CB6}"/>
+                <a16:creationId xmlns:a16="http://schemas.microsoft.com/office/drawing/2014/main" id="{06FC5F17-52F6-DADC-542A-B0EEE9B1FC07}"/>
               </a:ext>
             </a:extLst>
           </p:cNvPr>
@@ -4996,156 +4927,149 @@
         <p:spPr/>
         <p:txBody>
           <a:bodyPr>
-            <a:normAutofit fontScale="77500" lnSpcReduction="20000"/>
+            <a:normAutofit fontScale="62500" lnSpcReduction="20000"/>
           </a:bodyPr>
           <a:lstStyle/>
           <a:p>
-            <a:r>
-              <a:rPr lang="en-US" b="1" dirty="0"/>
-              <a:t>Module Name</a:t>
-            </a:r>
-          </a:p>
-          <a:p>
-            <a:pPr lvl="1"/>
-            <a:r>
-              <a:rPr lang="en-US" b="1" dirty="0"/>
-              <a:t>Single-Person Pose Estimation using </a:t>
-            </a:r>
-            <a:r>
-              <a:rPr lang="en-US" b="1" dirty="0" err="1"/>
-              <a:t>MediaPipe</a:t>
-            </a:r>
-            <a:r>
-              <a:rPr lang="en-US" b="1" dirty="0"/>
-              <a:t> </a:t>
-            </a:r>
-            <a:r>
-              <a:rPr lang="en-US" b="1" dirty="0" err="1"/>
-              <a:t>BlazePose</a:t>
-            </a:r>
-            <a:endParaRPr lang="en-US" dirty="0"/>
-          </a:p>
-          <a:p>
-            <a:r>
-              <a:rPr lang="en-US" b="1" dirty="0"/>
-              <a:t>Purpose</a:t>
-            </a:r>
-          </a:p>
-          <a:p>
-            <a:pPr lvl="1"/>
+            <a:pPr marL="0" indent="0">
+              <a:buNone/>
+            </a:pPr>
+            <a:r>
+              <a:rPr lang="es-ES" b="1" dirty="0"/>
+              <a:t>Final OUTPUT:</a:t>
+            </a:r>
+            <a:endParaRPr lang="es-ES" dirty="0"/>
+          </a:p>
+          <a:p>
+            <a:pPr marL="0" indent="0">
+              <a:buNone/>
+            </a:pPr>
+            <a:r>
+              <a:rPr lang="es-ES" sz="2300" dirty="0" err="1"/>
+              <a:t>Raider_BBoxes</a:t>
+            </a:r>
+            <a:r>
+              <a:rPr lang="es-ES" sz="2300" dirty="0"/>
+              <a:t> = {</a:t>
+            </a:r>
+          </a:p>
+          <a:p>
+            <a:pPr marL="0" indent="0">
+              <a:buNone/>
+            </a:pPr>
+            <a:r>
+              <a:rPr lang="es-ES" sz="2300" dirty="0"/>
+              <a:t>  frame_1: (x1, y1, x2, y2),</a:t>
+            </a:r>
+          </a:p>
+          <a:p>
+            <a:pPr marL="0" indent="0">
+              <a:buNone/>
+            </a:pPr>
+            <a:r>
+              <a:rPr lang="es-ES" sz="2300" dirty="0"/>
+              <a:t>  frame_2: (x1, y1, x2, y2),</a:t>
+            </a:r>
+          </a:p>
+          <a:p>
+            <a:pPr marL="0" indent="0">
+              <a:buNone/>
+            </a:pPr>
+            <a:r>
+              <a:rPr lang="es-ES" sz="2300" dirty="0"/>
+              <a:t>  ...</a:t>
+            </a:r>
+          </a:p>
+          <a:p>
+            <a:pPr marL="0" indent="0">
+              <a:buNone/>
+            </a:pPr>
+            <a:r>
+              <a:rPr lang="es-ES" sz="2300" dirty="0"/>
+              <a:t>}</a:t>
+            </a:r>
+          </a:p>
+          <a:p>
+            <a:pPr marL="0" indent="0">
+              <a:buNone/>
+            </a:pPr>
+            <a:endParaRPr lang="en-IN" dirty="0"/>
+          </a:p>
+          <a:p>
+            <a:pPr marL="0" indent="0">
+              <a:buNone/>
+            </a:pPr>
+            <a:r>
+              <a:rPr lang="en-IN" dirty="0"/>
+              <a:t>Sample I/P, O/P:</a:t>
+            </a:r>
+          </a:p>
+          <a:p>
+            <a:pPr marL="0" indent="0">
+              <a:buNone/>
+            </a:pPr>
             <a:r>
               <a:rPr lang="en-US" dirty="0"/>
-              <a:t>Extract of 2D skeletal </a:t>
-            </a:r>
-            <a:r>
-              <a:rPr lang="en-US" dirty="0" err="1"/>
-              <a:t>keypoints</a:t>
-            </a:r>
+              <a:t>	Sample Input: raw video with 5–7 players visible</a:t>
+            </a:r>
+          </a:p>
+          <a:p>
+            <a:pPr marL="0" indent="0">
+              <a:buNone/>
+            </a:pPr>
             <a:r>
               <a:rPr lang="en-US" dirty="0"/>
-              <a:t> of identified raider from video frames.</a:t>
-            </a:r>
-          </a:p>
-          <a:p>
-            <a:pPr lvl="1"/>
+              <a:t>	</a:t>
+            </a:r>
+          </a:p>
+          <a:p>
+            <a:pPr marL="0" indent="0">
+              <a:buNone/>
+            </a:pPr>
             <a:r>
               <a:rPr lang="en-US" dirty="0"/>
-              <a:t>Converts </a:t>
-            </a:r>
-            <a:r>
-              <a:rPr lang="en-US" b="1" dirty="0"/>
-              <a:t>pixel-level video data</a:t>
-            </a:r>
+              <a:t>Sample Output (video with annotations)</a:t>
+            </a:r>
+          </a:p>
+          <a:p>
+            <a:pPr marL="0" indent="0">
+              <a:buNone/>
+            </a:pPr>
             <a:r>
               <a:rPr lang="en-US" dirty="0"/>
-              <a:t> into </a:t>
-            </a:r>
-            <a:r>
-              <a:rPr lang="en-US" b="1" dirty="0"/>
-              <a:t>structured pose coordinates</a:t>
-            </a:r>
+              <a:t>	Frame 45:</a:t>
+            </a:r>
+          </a:p>
+          <a:p>
+            <a:pPr marL="0" indent="0">
+              <a:buNone/>
+            </a:pPr>
             <a:r>
               <a:rPr lang="en-US" dirty="0"/>
-              <a:t>.</a:t>
-            </a:r>
-          </a:p>
-          <a:p>
-            <a:pPr marL="457200" lvl="1" indent="0">
+              <a:t>	Raider ID = 3</a:t>
+            </a:r>
+          </a:p>
+          <a:p>
+            <a:pPr marL="0" indent="0">
               <a:buNone/>
             </a:pPr>
             <a:r>
               <a:rPr lang="en-US" dirty="0"/>
-              <a:t>Block </a:t>
-            </a:r>
-            <a:r>
-              <a:rPr lang="en-US" dirty="0" err="1"/>
-              <a:t>Digram</a:t>
-            </a:r>
-            <a:r>
-              <a:rPr lang="en-US" dirty="0"/>
-              <a:t>:</a:t>
-            </a:r>
-          </a:p>
-          <a:p>
-            <a:r>
-              <a:rPr lang="en-IN" dirty="0"/>
-              <a:t>Raider Bounding Box Sequence</a:t>
-            </a:r>
-          </a:p>
-          <a:p>
-            <a:r>
-              <a:rPr lang="en-IN" dirty="0"/>
-              <a:t>            ↓</a:t>
-            </a:r>
-          </a:p>
-          <a:p>
-            <a:r>
-              <a:rPr lang="en-IN" dirty="0"/>
-              <a:t>Frame-wise Raider Cropping</a:t>
-            </a:r>
-          </a:p>
-          <a:p>
-            <a:r>
-              <a:rPr lang="en-IN" dirty="0"/>
-              <a:t>            ↓</a:t>
-            </a:r>
-          </a:p>
-          <a:p>
-            <a:r>
-              <a:rPr lang="en-IN" dirty="0" err="1"/>
-              <a:t>MediaPipe</a:t>
-            </a:r>
-            <a:r>
-              <a:rPr lang="en-IN" dirty="0"/>
-              <a:t> Pose Estimation (MP33)</a:t>
-            </a:r>
-          </a:p>
-          <a:p>
-            <a:r>
-              <a:rPr lang="en-IN" dirty="0"/>
-              <a:t>            ↓</a:t>
-            </a:r>
-          </a:p>
-          <a:p>
-            <a:r>
-              <a:rPr lang="en-IN" dirty="0"/>
-              <a:t>Raw Pose </a:t>
-            </a:r>
-            <a:r>
-              <a:rPr lang="en-IN" dirty="0" err="1"/>
-              <a:t>Keypoints</a:t>
-            </a:r>
-            <a:r>
-              <a:rPr lang="en-IN" dirty="0"/>
-              <a:t> (33 joints, normalized)</a:t>
-            </a:r>
+              <a:t>	Bounding Box = (420, 180, 610, 520)</a:t>
+            </a:r>
+          </a:p>
+          <a:p>
+            <a:pPr marL="0" indent="0">
+              <a:buNone/>
+            </a:pPr>
+            <a:endParaRPr lang="en-IN" dirty="0"/>
           </a:p>
         </p:txBody>
       </p:sp>
     </p:spTree>
     <p:extLst>
       <p:ext uri="{BB962C8B-B14F-4D97-AF65-F5344CB8AC3E}">
-        <p14:creationId xmlns:p14="http://schemas.microsoft.com/office/powerpoint/2010/main" val="2575333430"/>
+        <p14:creationId xmlns:p14="http://schemas.microsoft.com/office/powerpoint/2010/main" val="1447314762"/>
       </p:ext>
     </p:extLst>
   </p:cSld>
@@ -5177,7 +5101,7 @@
           <p:cNvPr id="2" name="Title 1">
             <a:extLst>
               <a:ext uri="{FF2B5EF4-FFF2-40B4-BE49-F238E27FC236}">
-                <a16:creationId xmlns:a16="http://schemas.microsoft.com/office/drawing/2014/main" id="{97DEFECF-D69C-ECD3-F34B-CB92BEF81DB6}"/>
+                <a16:creationId xmlns:a16="http://schemas.microsoft.com/office/drawing/2014/main" id="{6CEEFE54-CD71-B1B9-E3FA-37100C9AB3AB}"/>
               </a:ext>
             </a:extLst>
           </p:cNvPr>
@@ -5188,24 +5112,16 @@
             <p:ph type="title"/>
           </p:nvPr>
         </p:nvSpPr>
-        <p:spPr>
-          <a:xfrm>
-            <a:off x="766638" y="103822"/>
-            <a:ext cx="10515600" cy="1325563"/>
-          </a:xfrm>
-        </p:spPr>
+        <p:spPr/>
         <p:txBody>
           <a:bodyPr/>
           <a:lstStyle/>
           <a:p>
             <a:r>
               <a:rPr lang="en-US" dirty="0"/>
-              <a:t>7B </a:t>
-            </a:r>
-            <a:r>
-              <a:rPr lang="en-IN" dirty="0"/>
-              <a:t>Algorithm Details</a:t>
-            </a:r>
+              <a:t>7A – Module Overview &amp; Block Diagram</a:t>
+            </a:r>
+            <a:endParaRPr lang="en-IN" dirty="0"/>
           </a:p>
         </p:txBody>
       </p:sp>
@@ -5214,7 +5130,7 @@
           <p:cNvPr id="3" name="Content Placeholder 2">
             <a:extLst>
               <a:ext uri="{FF2B5EF4-FFF2-40B4-BE49-F238E27FC236}">
-                <a16:creationId xmlns:a16="http://schemas.microsoft.com/office/drawing/2014/main" id="{9283857C-6DD6-396B-27C5-961CE39137CA}"/>
+                <a16:creationId xmlns:a16="http://schemas.microsoft.com/office/drawing/2014/main" id="{4665AFA0-3BE0-6961-BDD5-25E884B53CB6}"/>
               </a:ext>
             </a:extLst>
           </p:cNvPr>
@@ -5225,236 +5141,159 @@
             <p:ph idx="1"/>
           </p:nvPr>
         </p:nvSpPr>
-        <p:spPr>
-          <a:xfrm>
-            <a:off x="510871" y="1119285"/>
-            <a:ext cx="10515600" cy="4351338"/>
-          </a:xfrm>
-        </p:spPr>
+        <p:spPr/>
         <p:txBody>
           <a:bodyPr>
-            <a:noAutofit/>
+            <a:normAutofit fontScale="77500" lnSpcReduction="20000"/>
           </a:bodyPr>
           <a:lstStyle/>
           <a:p>
-            <a:endParaRPr lang="en-IN" sz="1050" b="1" dirty="0"/>
-          </a:p>
-          <a:p>
-            <a:pPr marL="0" indent="0">
+            <a:r>
+              <a:rPr lang="en-US" b="1" dirty="0"/>
+              <a:t>Module Name</a:t>
+            </a:r>
+          </a:p>
+          <a:p>
+            <a:pPr lvl="1"/>
+            <a:r>
+              <a:rPr lang="en-US" b="1" dirty="0"/>
+              <a:t>Single-Person Pose Estimation using </a:t>
+            </a:r>
+            <a:r>
+              <a:rPr lang="en-US" b="1" dirty="0" err="1"/>
+              <a:t>MediaPipe</a:t>
+            </a:r>
+            <a:r>
+              <a:rPr lang="en-US" b="1" dirty="0"/>
+              <a:t> </a:t>
+            </a:r>
+            <a:r>
+              <a:rPr lang="en-US" b="1" dirty="0" err="1"/>
+              <a:t>BlazePose</a:t>
+            </a:r>
+            <a:endParaRPr lang="en-US" dirty="0"/>
+          </a:p>
+          <a:p>
+            <a:r>
+              <a:rPr lang="en-US" b="1" dirty="0"/>
+              <a:t>Purpose</a:t>
+            </a:r>
+          </a:p>
+          <a:p>
+            <a:pPr lvl="1"/>
+            <a:r>
+              <a:rPr lang="en-US" dirty="0"/>
+              <a:t>Extract of 2D skeletal </a:t>
+            </a:r>
+            <a:r>
+              <a:rPr lang="en-US" dirty="0" err="1"/>
+              <a:t>keypoints</a:t>
+            </a:r>
+            <a:r>
+              <a:rPr lang="en-US" dirty="0"/>
+              <a:t> of identified raider from video frames.</a:t>
+            </a:r>
+          </a:p>
+          <a:p>
+            <a:pPr lvl="1"/>
+            <a:r>
+              <a:rPr lang="en-US" dirty="0"/>
+              <a:t>Converts </a:t>
+            </a:r>
+            <a:r>
+              <a:rPr lang="en-US" b="1" dirty="0"/>
+              <a:t>pixel-level video data</a:t>
+            </a:r>
+            <a:r>
+              <a:rPr lang="en-US" dirty="0"/>
+              <a:t> into </a:t>
+            </a:r>
+            <a:r>
+              <a:rPr lang="en-US" b="1" dirty="0"/>
+              <a:t>structured pose coordinates</a:t>
+            </a:r>
+            <a:r>
+              <a:rPr lang="en-US" dirty="0"/>
+              <a:t>.</a:t>
+            </a:r>
+          </a:p>
+          <a:p>
+            <a:pPr marL="457200" lvl="1" indent="0">
               <a:buNone/>
             </a:pPr>
             <a:r>
-              <a:rPr lang="en-IN" sz="1050" b="1" dirty="0"/>
-              <a:t>Algorithm Used</a:t>
-            </a:r>
-          </a:p>
-          <a:p>
-            <a:r>
-              <a:rPr lang="en-IN" sz="1050" b="1" dirty="0" err="1"/>
+              <a:rPr lang="en-US" dirty="0"/>
+              <a:t>Block </a:t>
+            </a:r>
+            <a:r>
+              <a:rPr lang="en-US" dirty="0" err="1"/>
+              <a:t>Digram</a:t>
+            </a:r>
+            <a:r>
+              <a:rPr lang="en-US" dirty="0"/>
+              <a:t>:</a:t>
+            </a:r>
+          </a:p>
+          <a:p>
+            <a:r>
+              <a:rPr lang="en-IN" dirty="0"/>
+              <a:t>Raider Bounding Box Sequence</a:t>
+            </a:r>
+          </a:p>
+          <a:p>
+            <a:r>
+              <a:rPr lang="en-IN" dirty="0"/>
+              <a:t>            ↓</a:t>
+            </a:r>
+          </a:p>
+          <a:p>
+            <a:r>
+              <a:rPr lang="en-IN" dirty="0"/>
+              <a:t>Frame-wise Raider Cropping</a:t>
+            </a:r>
+          </a:p>
+          <a:p>
+            <a:r>
+              <a:rPr lang="en-IN" dirty="0"/>
+              <a:t>            ↓</a:t>
+            </a:r>
+          </a:p>
+          <a:p>
+            <a:r>
+              <a:rPr lang="en-IN" dirty="0" err="1"/>
               <a:t>MediaPipe</a:t>
             </a:r>
             <a:r>
-              <a:rPr lang="en-IN" sz="1050" b="1" dirty="0"/>
-              <a:t> </a:t>
-            </a:r>
-            <a:r>
-              <a:rPr lang="en-IN" sz="1050" b="1" dirty="0" err="1"/>
-              <a:t>BlazePose</a:t>
-            </a:r>
-            <a:r>
-              <a:rPr lang="en-IN" sz="1050" b="1" dirty="0"/>
-              <a:t> (33-Keypoint Model)</a:t>
-            </a:r>
-            <a:br>
-              <a:rPr lang="en-IN" sz="1050" dirty="0"/>
-            </a:br>
-            <a:endParaRPr lang="en-IN" sz="1050" dirty="0"/>
-          </a:p>
-          <a:p>
-            <a:r>
-              <a:rPr lang="en-IN" sz="1050" b="1" dirty="0"/>
-              <a:t>Step 1: Raider-Locked Frame Cropping</a:t>
-            </a:r>
-          </a:p>
-          <a:p>
-            <a:pPr lvl="1"/>
-            <a:r>
-              <a:rPr lang="en-IN" sz="1050" dirty="0"/>
-              <a:t>Input: Frame + Raider Bounding Box</a:t>
-            </a:r>
-          </a:p>
-          <a:p>
-            <a:pPr lvl="1"/>
-            <a:r>
-              <a:rPr lang="en-IN" sz="1050" dirty="0"/>
-              <a:t>Padding: ±40 pixels</a:t>
-            </a:r>
-          </a:p>
-          <a:p>
-            <a:pPr lvl="1"/>
-            <a:r>
-              <a:rPr lang="en-IN" sz="1050" dirty="0"/>
-              <a:t>Clipping: Stay within frame bounds</a:t>
-            </a:r>
-          </a:p>
-          <a:p>
-            <a:pPr lvl="1"/>
-            <a:r>
-              <a:rPr lang="en-IN" sz="1050" b="1" dirty="0"/>
-              <a:t>Result: </a:t>
-            </a:r>
-            <a:r>
-              <a:rPr lang="en-IN" sz="1050" dirty="0"/>
-              <a:t>Tight region of interest (ROI) containing only the raider</a:t>
-            </a:r>
-            <a:br>
-              <a:rPr lang="en-IN" sz="1050" dirty="0"/>
-            </a:br>
-            <a:endParaRPr lang="en-IN" sz="1050" dirty="0"/>
-          </a:p>
-          <a:p>
-            <a:r>
-              <a:rPr lang="en-IN" sz="1050" b="1" dirty="0"/>
-              <a:t>Step 2: </a:t>
-            </a:r>
-            <a:r>
-              <a:rPr lang="en-IN" sz="1050" b="1" dirty="0" err="1"/>
-              <a:t>MediaPipe</a:t>
-            </a:r>
-            <a:r>
-              <a:rPr lang="en-IN" sz="1050" b="1" dirty="0"/>
-              <a:t> Pose Estimation </a:t>
-            </a:r>
-          </a:p>
-          <a:p>
-            <a:pPr lvl="1"/>
-            <a:r>
-              <a:rPr lang="en-IN" sz="1050" dirty="0"/>
-              <a:t>CNN-based pose estimation model</a:t>
-            </a:r>
-          </a:p>
-          <a:p>
-            <a:pPr lvl="1"/>
-            <a:r>
-              <a:rPr lang="en-IN" sz="1050" dirty="0"/>
-              <a:t>Trained for full-body human pose</a:t>
-            </a:r>
-          </a:p>
-          <a:p>
-            <a:pPr lvl="1"/>
-            <a:r>
-              <a:rPr lang="en-IN" sz="1050" b="1" dirty="0"/>
-              <a:t>Configuration Used</a:t>
-            </a:r>
-            <a:endParaRPr lang="en-IN" sz="1050" dirty="0"/>
-          </a:p>
-          <a:p>
-            <a:pPr lvl="2"/>
-            <a:r>
-              <a:rPr lang="en-IN" sz="1050" dirty="0"/>
-              <a:t>Videos (not static image)</a:t>
-            </a:r>
-          </a:p>
-          <a:p>
-            <a:pPr lvl="2"/>
-            <a:r>
-              <a:rPr lang="en-IN" sz="1050" dirty="0"/>
-              <a:t>Temporal landmark smoothing enabled</a:t>
-            </a:r>
-          </a:p>
-          <a:p>
-            <a:pPr lvl="2"/>
-            <a:r>
-              <a:rPr lang="en-IN" sz="1050" dirty="0"/>
-              <a:t>Confidence thresholds applied internally</a:t>
-            </a:r>
-            <a:br>
-              <a:rPr lang="en-IN" sz="1050" dirty="0"/>
-            </a:br>
-            <a:endParaRPr lang="en-IN" sz="1050" dirty="0"/>
-          </a:p>
-          <a:p>
-            <a:r>
-              <a:rPr lang="en-IN" sz="1050" b="1" dirty="0"/>
-              <a:t>Pose Representation</a:t>
-            </a:r>
-          </a:p>
-          <a:p>
-            <a:pPr marL="457200" lvl="1" indent="0">
-              <a:buNone/>
-            </a:pPr>
-            <a:r>
-              <a:rPr lang="en-IN" sz="1050" dirty="0"/>
-              <a:t>For each frame:</a:t>
-            </a:r>
-          </a:p>
-          <a:p>
-            <a:pPr marL="457200" lvl="1" indent="0">
-              <a:buNone/>
-            </a:pPr>
-            <a:r>
-              <a:rPr lang="en-IN" sz="1050" dirty="0" err="1"/>
-              <a:t>Pose_t</a:t>
-            </a:r>
-            <a:r>
-              <a:rPr lang="en-IN" sz="1050" dirty="0"/>
-              <a:t> = {</a:t>
-            </a:r>
-          </a:p>
-          <a:p>
-            <a:pPr marL="457200" lvl="1" indent="0">
-              <a:buNone/>
-            </a:pPr>
-            <a:r>
-              <a:rPr lang="en-IN" sz="1050" dirty="0"/>
-              <a:t>	joint_0: (x, y),</a:t>
-            </a:r>
-          </a:p>
-          <a:p>
-            <a:pPr marL="457200" lvl="1" indent="0">
-              <a:buNone/>
-            </a:pPr>
-            <a:r>
-              <a:rPr lang="en-IN" sz="1050" dirty="0"/>
-              <a:t>	joint_1: (x, y),</a:t>
-            </a:r>
-          </a:p>
-          <a:p>
-            <a:pPr marL="457200" lvl="1" indent="0">
-              <a:buNone/>
-            </a:pPr>
-            <a:r>
-              <a:rPr lang="en-IN" sz="1050" dirty="0"/>
-              <a:t>	...</a:t>
-            </a:r>
-          </a:p>
-          <a:p>
-            <a:pPr marL="457200" lvl="1" indent="0">
-              <a:buNone/>
-            </a:pPr>
-            <a:r>
-              <a:rPr lang="en-IN" sz="1050" dirty="0"/>
-              <a:t>	joint_32: (x, y)</a:t>
-            </a:r>
-          </a:p>
-          <a:p>
-            <a:pPr marL="457200" lvl="1" indent="0">
-              <a:buNone/>
-            </a:pPr>
-            <a:r>
-              <a:rPr lang="en-IN" sz="1050" dirty="0"/>
-              <a:t>}</a:t>
-            </a:r>
-          </a:p>
-          <a:p>
-            <a:endParaRPr lang="en-IN" sz="1050" dirty="0"/>
+              <a:rPr lang="en-IN" dirty="0"/>
+              <a:t> Pose Estimation (MP33)</a:t>
+            </a:r>
+          </a:p>
+          <a:p>
+            <a:r>
+              <a:rPr lang="en-IN" dirty="0"/>
+              <a:t>            ↓</a:t>
+            </a:r>
+          </a:p>
+          <a:p>
+            <a:r>
+              <a:rPr lang="en-IN" dirty="0"/>
+              <a:t>Raw Pose </a:t>
+            </a:r>
+            <a:r>
+              <a:rPr lang="en-IN" dirty="0" err="1"/>
+              <a:t>Keypoints</a:t>
+            </a:r>
+            <a:r>
+              <a:rPr lang="en-IN" dirty="0"/>
+              <a:t> (33 joints, normalized)</a:t>
+            </a:r>
           </a:p>
         </p:txBody>
       </p:sp>
     </p:spTree>
     <p:extLst>
       <p:ext uri="{BB962C8B-B14F-4D97-AF65-F5344CB8AC3E}">
-        <p14:creationId xmlns:p14="http://schemas.microsoft.com/office/powerpoint/2010/main" val="1194807860"/>
+        <p14:creationId xmlns:p14="http://schemas.microsoft.com/office/powerpoint/2010/main" val="2575333430"/>
       </p:ext>
     </p:extLst>
   </p:cSld>
@@ -5486,7 +5325,7 @@
           <p:cNvPr id="2" name="Title 1">
             <a:extLst>
               <a:ext uri="{FF2B5EF4-FFF2-40B4-BE49-F238E27FC236}">
-                <a16:creationId xmlns:a16="http://schemas.microsoft.com/office/drawing/2014/main" id="{E81DDACD-A699-B0CB-5507-335B830A933F}"/>
+                <a16:creationId xmlns:a16="http://schemas.microsoft.com/office/drawing/2014/main" id="{97DEFECF-D69C-ECD3-F34B-CB92BEF81DB6}"/>
               </a:ext>
             </a:extLst>
           </p:cNvPr>
@@ -5497,7 +5336,12 @@
             <p:ph type="title"/>
           </p:nvPr>
         </p:nvSpPr>
-        <p:spPr/>
+        <p:spPr>
+          <a:xfrm>
+            <a:off x="766638" y="103822"/>
+            <a:ext cx="10515600" cy="1325563"/>
+          </a:xfrm>
+        </p:spPr>
         <p:txBody>
           <a:bodyPr/>
           <a:lstStyle/>
@@ -5508,15 +5352,7 @@
             </a:r>
             <a:r>
               <a:rPr lang="en-IN" dirty="0"/>
-              <a:t>Algorithm Details (</a:t>
-            </a:r>
-            <a:r>
-              <a:rPr lang="en-IN" dirty="0" err="1"/>
-              <a:t>cont</a:t>
-            </a:r>
-            <a:r>
-              <a:rPr lang="en-IN" dirty="0"/>
-              <a:t>)</a:t>
+              <a:t>Algorithm Details</a:t>
             </a:r>
           </a:p>
         </p:txBody>
@@ -5526,7 +5362,7 @@
           <p:cNvPr id="3" name="Content Placeholder 2">
             <a:extLst>
               <a:ext uri="{FF2B5EF4-FFF2-40B4-BE49-F238E27FC236}">
-                <a16:creationId xmlns:a16="http://schemas.microsoft.com/office/drawing/2014/main" id="{2045A5BB-49A5-7E5B-6EF3-081DC7FF1013}"/>
+                <a16:creationId xmlns:a16="http://schemas.microsoft.com/office/drawing/2014/main" id="{9283857C-6DD6-396B-27C5-961CE39137CA}"/>
               </a:ext>
             </a:extLst>
           </p:cNvPr>
@@ -5537,135 +5373,236 @@
             <p:ph idx="1"/>
           </p:nvPr>
         </p:nvSpPr>
-        <p:spPr/>
+        <p:spPr>
+          <a:xfrm>
+            <a:off x="510871" y="1119285"/>
+            <a:ext cx="10515600" cy="4351338"/>
+          </a:xfrm>
+        </p:spPr>
         <p:txBody>
           <a:bodyPr>
-            <a:normAutofit fontScale="62500" lnSpcReduction="20000"/>
+            <a:noAutofit/>
           </a:bodyPr>
           <a:lstStyle/>
           <a:p>
-            <a:r>
-              <a:rPr lang="en-US" b="1" dirty="0"/>
-              <a:t>Sample Input &amp; Output</a:t>
+            <a:endParaRPr lang="en-IN" sz="1050" b="1" dirty="0"/>
+          </a:p>
+          <a:p>
+            <a:pPr marL="0" indent="0">
+              <a:buNone/>
+            </a:pPr>
+            <a:r>
+              <a:rPr lang="en-IN" sz="1050" b="1" dirty="0"/>
+              <a:t>Algorithm Used</a:t>
+            </a:r>
+          </a:p>
+          <a:p>
+            <a:r>
+              <a:rPr lang="en-IN" sz="1050" b="1" dirty="0" err="1"/>
+              <a:t>MediaPipe</a:t>
+            </a:r>
+            <a:r>
+              <a:rPr lang="en-IN" sz="1050" b="1" dirty="0"/>
+              <a:t> </a:t>
+            </a:r>
+            <a:r>
+              <a:rPr lang="en-IN" sz="1050" b="1" dirty="0" err="1"/>
+              <a:t>BlazePose</a:t>
+            </a:r>
+            <a:r>
+              <a:rPr lang="en-IN" sz="1050" b="1" dirty="0"/>
+              <a:t> (33-Keypoint Model)</a:t>
+            </a:r>
+            <a:br>
+              <a:rPr lang="en-IN" sz="1050" dirty="0"/>
+            </a:br>
+            <a:endParaRPr lang="en-IN" sz="1050" dirty="0"/>
+          </a:p>
+          <a:p>
+            <a:r>
+              <a:rPr lang="en-IN" sz="1050" b="1" dirty="0"/>
+              <a:t>Step 1: Raider-Locked Frame Cropping</a:t>
             </a:r>
           </a:p>
           <a:p>
             <a:pPr lvl="1"/>
             <a:r>
-              <a:rPr lang="en-US" b="1" dirty="0"/>
-              <a:t>Sample Input</a:t>
-            </a:r>
+              <a:rPr lang="en-IN" sz="1050" dirty="0"/>
+              <a:t>Input: Frame + Raider Bounding Box</a:t>
+            </a:r>
+          </a:p>
+          <a:p>
+            <a:pPr lvl="1"/>
+            <a:r>
+              <a:rPr lang="en-IN" sz="1050" dirty="0"/>
+              <a:t>Padding: ±40 pixels</a:t>
+            </a:r>
+          </a:p>
+          <a:p>
+            <a:pPr lvl="1"/>
+            <a:r>
+              <a:rPr lang="en-IN" sz="1050" dirty="0"/>
+              <a:t>Clipping: Stay within frame bounds</a:t>
+            </a:r>
+          </a:p>
+          <a:p>
+            <a:pPr lvl="1"/>
+            <a:r>
+              <a:rPr lang="en-IN" sz="1050" b="1" dirty="0"/>
+              <a:t>Result: </a:t>
+            </a:r>
+            <a:r>
+              <a:rPr lang="en-IN" sz="1050" dirty="0"/>
+              <a:t>Tight region of interest (ROI) containing only the raider</a:t>
+            </a:r>
+            <a:br>
+              <a:rPr lang="en-IN" sz="1050" dirty="0"/>
+            </a:br>
+            <a:endParaRPr lang="en-IN" sz="1050" dirty="0"/>
+          </a:p>
+          <a:p>
+            <a:r>
+              <a:rPr lang="en-IN" sz="1050" b="1" dirty="0"/>
+              <a:t>Step 2: </a:t>
+            </a:r>
+            <a:r>
+              <a:rPr lang="en-IN" sz="1050" b="1" dirty="0" err="1"/>
+              <a:t>MediaPipe</a:t>
+            </a:r>
+            <a:r>
+              <a:rPr lang="en-IN" sz="1050" b="1" dirty="0"/>
+              <a:t> Pose Estimation </a:t>
+            </a:r>
+          </a:p>
+          <a:p>
+            <a:pPr lvl="1"/>
+            <a:r>
+              <a:rPr lang="en-IN" sz="1050" dirty="0"/>
+              <a:t>CNN-based pose estimation model</a:t>
+            </a:r>
+          </a:p>
+          <a:p>
+            <a:pPr lvl="1"/>
+            <a:r>
+              <a:rPr lang="en-IN" sz="1050" dirty="0"/>
+              <a:t>Trained for full-body human pose</a:t>
+            </a:r>
+          </a:p>
+          <a:p>
+            <a:pPr lvl="1"/>
+            <a:r>
+              <a:rPr lang="en-IN" sz="1050" b="1" dirty="0"/>
+              <a:t>Configuration Used</a:t>
+            </a:r>
+            <a:endParaRPr lang="en-IN" sz="1050" dirty="0"/>
           </a:p>
           <a:p>
             <a:pPr lvl="2"/>
             <a:r>
-              <a:rPr lang="en-US" dirty="0"/>
-              <a:t>Frame 120</a:t>
+              <a:rPr lang="en-IN" sz="1050" dirty="0"/>
+              <a:t>Videos (not static image)</a:t>
             </a:r>
           </a:p>
           <a:p>
             <a:pPr lvl="2"/>
             <a:r>
-              <a:rPr lang="en-US" dirty="0"/>
-              <a:t>Raider Bounding Box = (420, 180, 610, 520)</a:t>
-            </a:r>
-          </a:p>
-          <a:p>
-            <a:r>
-              <a:rPr lang="en-US" b="1" dirty="0"/>
-              <a:t>Sample Output</a:t>
-            </a:r>
-          </a:p>
-          <a:p>
-            <a:pPr marL="0" indent="0">
+              <a:rPr lang="en-IN" sz="1050" dirty="0"/>
+              <a:t>Temporal landmark smoothing enabled</a:t>
+            </a:r>
+          </a:p>
+          <a:p>
+            <a:pPr lvl="2"/>
+            <a:r>
+              <a:rPr lang="en-IN" sz="1050" dirty="0"/>
+              <a:t>Confidence thresholds applied internally</a:t>
+            </a:r>
+            <a:br>
+              <a:rPr lang="en-IN" sz="1050" dirty="0"/>
+            </a:br>
+            <a:endParaRPr lang="en-IN" sz="1050" dirty="0"/>
+          </a:p>
+          <a:p>
+            <a:r>
+              <a:rPr lang="en-IN" sz="1050" b="1" dirty="0"/>
+              <a:t>Pose Representation</a:t>
+            </a:r>
+          </a:p>
+          <a:p>
+            <a:pPr marL="457200" lvl="1" indent="0">
               <a:buNone/>
             </a:pPr>
             <a:r>
-              <a:rPr lang="en-US" dirty="0"/>
-              <a:t>Pose[120] =</a:t>
-            </a:r>
-          </a:p>
-          <a:p>
-            <a:pPr marL="0" indent="0">
+              <a:rPr lang="en-IN" sz="1050" dirty="0"/>
+              <a:t>For each frame:</a:t>
+            </a:r>
+          </a:p>
+          <a:p>
+            <a:pPr marL="457200" lvl="1" indent="0">
               <a:buNone/>
             </a:pPr>
             <a:r>
-              <a:rPr lang="en-US" dirty="0"/>
-              <a:t>	[</a:t>
-            </a:r>
-          </a:p>
-          <a:p>
-            <a:pPr marL="0" indent="0">
+              <a:rPr lang="en-IN" sz="1050" dirty="0" err="1"/>
+              <a:t>Pose_t</a:t>
+            </a:r>
+            <a:r>
+              <a:rPr lang="en-IN" sz="1050" dirty="0"/>
+              <a:t> = {</a:t>
+            </a:r>
+          </a:p>
+          <a:p>
+            <a:pPr marL="457200" lvl="1" indent="0">
               <a:buNone/>
             </a:pPr>
             <a:r>
-              <a:rPr lang="en-US" dirty="0"/>
-              <a:t>  		(0.48, 0.12),   # nose</a:t>
-            </a:r>
-          </a:p>
-          <a:p>
-            <a:pPr marL="0" indent="0">
+              <a:rPr lang="en-IN" sz="1050" dirty="0"/>
+              <a:t>	joint_0: (x, y),</a:t>
+            </a:r>
+          </a:p>
+          <a:p>
+            <a:pPr marL="457200" lvl="1" indent="0">
               <a:buNone/>
             </a:pPr>
             <a:r>
-              <a:rPr lang="en-US" dirty="0"/>
-              <a:t>  		(0.46, 0.10),   # left eye</a:t>
-            </a:r>
-          </a:p>
-          <a:p>
-            <a:pPr marL="0" indent="0">
+              <a:rPr lang="en-IN" sz="1050" dirty="0"/>
+              <a:t>	joint_1: (x, y),</a:t>
+            </a:r>
+          </a:p>
+          <a:p>
+            <a:pPr marL="457200" lvl="1" indent="0">
               <a:buNone/>
             </a:pPr>
             <a:r>
-              <a:rPr lang="en-US" dirty="0"/>
-              <a:t>  		...</a:t>
-            </a:r>
-          </a:p>
-          <a:p>
-            <a:pPr marL="0" indent="0">
+              <a:rPr lang="en-IN" sz="1050" dirty="0"/>
+              <a:t>	...</a:t>
+            </a:r>
+          </a:p>
+          <a:p>
+            <a:pPr marL="457200" lvl="1" indent="0">
               <a:buNone/>
             </a:pPr>
             <a:r>
-              <a:rPr lang="en-US" dirty="0"/>
-              <a:t>  		(0.52, 0.91)    # right foot</a:t>
-            </a:r>
-          </a:p>
-          <a:p>
-            <a:pPr marL="0" indent="0">
+              <a:rPr lang="en-IN" sz="1050" dirty="0"/>
+              <a:t>	joint_32: (x, y)</a:t>
+            </a:r>
+          </a:p>
+          <a:p>
+            <a:pPr marL="457200" lvl="1" indent="0">
               <a:buNone/>
             </a:pPr>
             <a:r>
-              <a:rPr lang="en-US" dirty="0"/>
-              <a:t>	]</a:t>
-            </a:r>
-          </a:p>
-          <a:p>
-            <a:pPr marL="0" indent="0">
-              <a:buNone/>
-            </a:pPr>
-            <a:r>
-              <a:rPr lang="en-US" dirty="0"/>
-              <a:t>Shape:</a:t>
-            </a:r>
-          </a:p>
-          <a:p>
-            <a:pPr marL="0" indent="0">
-              <a:buNone/>
-            </a:pPr>
-            <a:r>
-              <a:rPr lang="en-US" dirty="0"/>
-              <a:t>(33 joints × 2 coordinates)</a:t>
-            </a:r>
-          </a:p>
-          <a:p>
-            <a:endParaRPr lang="en-IN" dirty="0"/>
+              <a:rPr lang="en-IN" sz="1050" dirty="0"/>
+              <a:t>}</a:t>
+            </a:r>
+          </a:p>
+          <a:p>
+            <a:endParaRPr lang="en-IN" sz="1050" dirty="0"/>
           </a:p>
         </p:txBody>
       </p:sp>
     </p:spTree>
     <p:extLst>
       <p:ext uri="{BB962C8B-B14F-4D97-AF65-F5344CB8AC3E}">
-        <p14:creationId xmlns:p14="http://schemas.microsoft.com/office/powerpoint/2010/main" val="634446116"/>
+        <p14:creationId xmlns:p14="http://schemas.microsoft.com/office/powerpoint/2010/main" val="1194807860"/>
       </p:ext>
     </p:extLst>
   </p:cSld>
@@ -5697,6 +5634,217 @@
           <p:cNvPr id="2" name="Title 1">
             <a:extLst>
               <a:ext uri="{FF2B5EF4-FFF2-40B4-BE49-F238E27FC236}">
+                <a16:creationId xmlns:a16="http://schemas.microsoft.com/office/drawing/2014/main" id="{E81DDACD-A699-B0CB-5507-335B830A933F}"/>
+              </a:ext>
+            </a:extLst>
+          </p:cNvPr>
+          <p:cNvSpPr>
+            <a:spLocks noGrp="1"/>
+          </p:cNvSpPr>
+          <p:nvPr>
+            <p:ph type="title"/>
+          </p:nvPr>
+        </p:nvSpPr>
+        <p:spPr/>
+        <p:txBody>
+          <a:bodyPr/>
+          <a:lstStyle/>
+          <a:p>
+            <a:r>
+              <a:rPr lang="en-US" dirty="0"/>
+              <a:t>7B </a:t>
+            </a:r>
+            <a:r>
+              <a:rPr lang="en-IN" dirty="0"/>
+              <a:t>Algorithm Details (</a:t>
+            </a:r>
+            <a:r>
+              <a:rPr lang="en-IN" dirty="0" err="1"/>
+              <a:t>cont</a:t>
+            </a:r>
+            <a:r>
+              <a:rPr lang="en-IN" dirty="0"/>
+              <a:t>)</a:t>
+            </a:r>
+          </a:p>
+        </p:txBody>
+      </p:sp>
+      <p:sp>
+        <p:nvSpPr>
+          <p:cNvPr id="3" name="Content Placeholder 2">
+            <a:extLst>
+              <a:ext uri="{FF2B5EF4-FFF2-40B4-BE49-F238E27FC236}">
+                <a16:creationId xmlns:a16="http://schemas.microsoft.com/office/drawing/2014/main" id="{2045A5BB-49A5-7E5B-6EF3-081DC7FF1013}"/>
+              </a:ext>
+            </a:extLst>
+          </p:cNvPr>
+          <p:cNvSpPr>
+            <a:spLocks noGrp="1"/>
+          </p:cNvSpPr>
+          <p:nvPr>
+            <p:ph idx="1"/>
+          </p:nvPr>
+        </p:nvSpPr>
+        <p:spPr/>
+        <p:txBody>
+          <a:bodyPr>
+            <a:normAutofit fontScale="62500" lnSpcReduction="20000"/>
+          </a:bodyPr>
+          <a:lstStyle/>
+          <a:p>
+            <a:r>
+              <a:rPr lang="en-US" b="1" dirty="0"/>
+              <a:t>Sample Input &amp; Output</a:t>
+            </a:r>
+          </a:p>
+          <a:p>
+            <a:pPr lvl="1"/>
+            <a:r>
+              <a:rPr lang="en-US" b="1" dirty="0"/>
+              <a:t>Sample Input</a:t>
+            </a:r>
+          </a:p>
+          <a:p>
+            <a:pPr lvl="2"/>
+            <a:r>
+              <a:rPr lang="en-US" dirty="0"/>
+              <a:t>Frame 120</a:t>
+            </a:r>
+          </a:p>
+          <a:p>
+            <a:pPr lvl="2"/>
+            <a:r>
+              <a:rPr lang="en-US" dirty="0"/>
+              <a:t>Raider Bounding Box = (420, 180, 610, 520)</a:t>
+            </a:r>
+          </a:p>
+          <a:p>
+            <a:r>
+              <a:rPr lang="en-US" b="1" dirty="0"/>
+              <a:t>Sample Output</a:t>
+            </a:r>
+          </a:p>
+          <a:p>
+            <a:pPr marL="0" indent="0">
+              <a:buNone/>
+            </a:pPr>
+            <a:r>
+              <a:rPr lang="en-US" dirty="0"/>
+              <a:t>Pose[120] =</a:t>
+            </a:r>
+          </a:p>
+          <a:p>
+            <a:pPr marL="0" indent="0">
+              <a:buNone/>
+            </a:pPr>
+            <a:r>
+              <a:rPr lang="en-US" dirty="0"/>
+              <a:t>	[</a:t>
+            </a:r>
+          </a:p>
+          <a:p>
+            <a:pPr marL="0" indent="0">
+              <a:buNone/>
+            </a:pPr>
+            <a:r>
+              <a:rPr lang="en-US" dirty="0"/>
+              <a:t>  		(0.48, 0.12),   # nose</a:t>
+            </a:r>
+          </a:p>
+          <a:p>
+            <a:pPr marL="0" indent="0">
+              <a:buNone/>
+            </a:pPr>
+            <a:r>
+              <a:rPr lang="en-US" dirty="0"/>
+              <a:t>  		(0.46, 0.10),   # left eye</a:t>
+            </a:r>
+          </a:p>
+          <a:p>
+            <a:pPr marL="0" indent="0">
+              <a:buNone/>
+            </a:pPr>
+            <a:r>
+              <a:rPr lang="en-US" dirty="0"/>
+              <a:t>  		...</a:t>
+            </a:r>
+          </a:p>
+          <a:p>
+            <a:pPr marL="0" indent="0">
+              <a:buNone/>
+            </a:pPr>
+            <a:r>
+              <a:rPr lang="en-US" dirty="0"/>
+              <a:t>  		(0.52, 0.91)    # right foot</a:t>
+            </a:r>
+          </a:p>
+          <a:p>
+            <a:pPr marL="0" indent="0">
+              <a:buNone/>
+            </a:pPr>
+            <a:r>
+              <a:rPr lang="en-US" dirty="0"/>
+              <a:t>	]</a:t>
+            </a:r>
+          </a:p>
+          <a:p>
+            <a:pPr marL="0" indent="0">
+              <a:buNone/>
+            </a:pPr>
+            <a:r>
+              <a:rPr lang="en-US" dirty="0"/>
+              <a:t>Shape:</a:t>
+            </a:r>
+          </a:p>
+          <a:p>
+            <a:pPr marL="0" indent="0">
+              <a:buNone/>
+            </a:pPr>
+            <a:r>
+              <a:rPr lang="en-US" dirty="0"/>
+              <a:t>(33 joints × 2 coordinates)</a:t>
+            </a:r>
+          </a:p>
+          <a:p>
+            <a:endParaRPr lang="en-IN" dirty="0"/>
+          </a:p>
+        </p:txBody>
+      </p:sp>
+    </p:spTree>
+    <p:extLst>
+      <p:ext uri="{BB962C8B-B14F-4D97-AF65-F5344CB8AC3E}">
+        <p14:creationId xmlns:p14="http://schemas.microsoft.com/office/powerpoint/2010/main" val="634446116"/>
+      </p:ext>
+    </p:extLst>
+  </p:cSld>
+  <p:clrMapOvr>
+    <a:masterClrMapping/>
+  </p:clrMapOvr>
+</p:sld>
+</file>
+
+<file path=ppt/slides/slide16.xml><?xml version="1.0" encoding="utf-8"?>
+<p:sld xmlns:a="http://schemas.openxmlformats.org/drawingml/2006/main" xmlns:r="http://schemas.openxmlformats.org/officeDocument/2006/relationships" xmlns:p="http://schemas.openxmlformats.org/presentationml/2006/main">
+  <p:cSld>
+    <p:spTree>
+      <p:nvGrpSpPr>
+        <p:cNvPr id="1" name=""/>
+        <p:cNvGrpSpPr/>
+        <p:nvPr/>
+      </p:nvGrpSpPr>
+      <p:grpSpPr>
+        <a:xfrm>
+          <a:off x="0" y="0"/>
+          <a:ext cx="0" cy="0"/>
+          <a:chOff x="0" y="0"/>
+          <a:chExt cx="0" cy="0"/>
+        </a:xfrm>
+      </p:grpSpPr>
+      <p:sp>
+        <p:nvSpPr>
+          <p:cNvPr id="2" name="Title 1">
+            <a:extLst>
+              <a:ext uri="{FF2B5EF4-FFF2-40B4-BE49-F238E27FC236}">
                 <a16:creationId xmlns:a16="http://schemas.microsoft.com/office/drawing/2014/main" id="{A973BFC9-45AE-7789-4032-D7B7C0C78819}"/>
               </a:ext>
             </a:extLst>
@@ -5871,7 +6019,7 @@
 </p:sld>
 </file>
 
-<file path=ppt/slides/slide16.xml><?xml version="1.0" encoding="utf-8"?>
+<file path=ppt/slides/slide17.xml><?xml version="1.0" encoding="utf-8"?>
 <p:sld xmlns:a="http://schemas.openxmlformats.org/drawingml/2006/main" xmlns:r="http://schemas.openxmlformats.org/officeDocument/2006/relationships" xmlns:p="http://schemas.openxmlformats.org/presentationml/2006/main">
   <p:cSld>
     <p:spTree>
@@ -6037,203 +6185,6 @@
 </p:sld>
 </file>
 
-<file path=ppt/slides/slide17.xml><?xml version="1.0" encoding="utf-8"?>
-<p:sld xmlns:a="http://schemas.openxmlformats.org/drawingml/2006/main" xmlns:r="http://schemas.openxmlformats.org/officeDocument/2006/relationships" xmlns:p="http://schemas.openxmlformats.org/presentationml/2006/main">
-  <p:cSld>
-    <p:spTree>
-      <p:nvGrpSpPr>
-        <p:cNvPr id="1" name=""/>
-        <p:cNvGrpSpPr/>
-        <p:nvPr/>
-      </p:nvGrpSpPr>
-      <p:grpSpPr>
-        <a:xfrm>
-          <a:off x="0" y="0"/>
-          <a:ext cx="0" cy="0"/>
-          <a:chOff x="0" y="0"/>
-          <a:chExt cx="0" cy="0"/>
-        </a:xfrm>
-      </p:grpSpPr>
-      <p:sp>
-        <p:nvSpPr>
-          <p:cNvPr id="2" name="Title 1">
-            <a:extLst>
-              <a:ext uri="{FF2B5EF4-FFF2-40B4-BE49-F238E27FC236}">
-                <a16:creationId xmlns:a16="http://schemas.microsoft.com/office/drawing/2014/main" id="{6B998CD9-0608-1405-1E04-16235A228432}"/>
-              </a:ext>
-            </a:extLst>
-          </p:cNvPr>
-          <p:cNvSpPr>
-            <a:spLocks noGrp="1"/>
-          </p:cNvSpPr>
-          <p:nvPr>
-            <p:ph type="title"/>
-          </p:nvPr>
-        </p:nvSpPr>
-        <p:spPr/>
-        <p:txBody>
-          <a:bodyPr/>
-          <a:lstStyle/>
-          <a:p>
-            <a:r>
-              <a:rPr lang="en-IN" dirty="0"/>
-              <a:t>8B Algorithm Details (</a:t>
-            </a:r>
-            <a:r>
-              <a:rPr lang="en-IN" dirty="0" err="1"/>
-              <a:t>cont</a:t>
-            </a:r>
-            <a:r>
-              <a:rPr lang="en-IN" dirty="0"/>
-              <a:t>)</a:t>
-            </a:r>
-          </a:p>
-        </p:txBody>
-      </p:sp>
-      <p:sp>
-        <p:nvSpPr>
-          <p:cNvPr id="3" name="Content Placeholder 2">
-            <a:extLst>
-              <a:ext uri="{FF2B5EF4-FFF2-40B4-BE49-F238E27FC236}">
-                <a16:creationId xmlns:a16="http://schemas.microsoft.com/office/drawing/2014/main" id="{93316AD2-6CBA-F4E7-F110-63043A905667}"/>
-              </a:ext>
-            </a:extLst>
-          </p:cNvPr>
-          <p:cNvSpPr>
-            <a:spLocks noGrp="1"/>
-          </p:cNvSpPr>
-          <p:nvPr>
-            <p:ph idx="1"/>
-          </p:nvPr>
-        </p:nvSpPr>
-        <p:spPr/>
-        <p:txBody>
-          <a:bodyPr/>
-          <a:lstStyle/>
-          <a:p>
-            <a:r>
-              <a:rPr lang="en-IN" dirty="0"/>
-              <a:t>Step 2: Coordinate Transformation</a:t>
-            </a:r>
-          </a:p>
-          <a:p>
-            <a:pPr lvl="1"/>
-            <a:r>
-              <a:rPr lang="en-IN" b="1" dirty="0"/>
-              <a:t>Transformation Formula</a:t>
-            </a:r>
-          </a:p>
-          <a:p>
-            <a:pPr marL="457200" lvl="1" indent="0">
-              <a:buNone/>
-            </a:pPr>
-            <a:r>
-              <a:rPr lang="en-IN" dirty="0"/>
-              <a:t>	For each joint:</a:t>
-            </a:r>
-          </a:p>
-          <a:p>
-            <a:pPr marL="914400" lvl="2" indent="0">
-              <a:buNone/>
-            </a:pPr>
-            <a:r>
-              <a:rPr lang="en-IN" dirty="0"/>
-              <a:t>	</a:t>
-            </a:r>
-            <a:r>
-              <a:rPr lang="en-IN" dirty="0" err="1"/>
-              <a:t>x_pixel</a:t>
-            </a:r>
-            <a:r>
-              <a:rPr lang="en-IN" dirty="0"/>
-              <a:t> = bbox_x1 + </a:t>
-            </a:r>
-            <a:r>
-              <a:rPr lang="en-IN" dirty="0" err="1"/>
-              <a:t>lm.x</a:t>
-            </a:r>
-            <a:r>
-              <a:rPr lang="en-IN" dirty="0"/>
-              <a:t> × </a:t>
-            </a:r>
-            <a:r>
-              <a:rPr lang="en-IN" dirty="0" err="1"/>
-              <a:t>bbox_width</a:t>
-            </a:r>
-            <a:endParaRPr lang="en-IN" dirty="0"/>
-          </a:p>
-          <a:p>
-            <a:pPr marL="1828800" lvl="4" indent="0">
-              <a:buNone/>
-            </a:pPr>
-            <a:r>
-              <a:rPr lang="en-IN" dirty="0" err="1"/>
-              <a:t>y_pixel</a:t>
-            </a:r>
-            <a:r>
-              <a:rPr lang="en-IN" dirty="0"/>
-              <a:t> = bbox_y1 + </a:t>
-            </a:r>
-            <a:r>
-              <a:rPr lang="en-IN" dirty="0" err="1"/>
-              <a:t>lm.y</a:t>
-            </a:r>
-            <a:r>
-              <a:rPr lang="en-IN" dirty="0"/>
-              <a:t> × </a:t>
-            </a:r>
-            <a:r>
-              <a:rPr lang="en-IN" dirty="0" err="1"/>
-              <a:t>bbox_height</a:t>
-            </a:r>
-            <a:endParaRPr lang="en-IN" dirty="0"/>
-          </a:p>
-          <a:p>
-            <a:pPr lvl="1"/>
-            <a:r>
-              <a:rPr lang="en-IN" b="1" dirty="0"/>
-              <a:t>Visibility Rule</a:t>
-            </a:r>
-            <a:endParaRPr lang="en-IN" dirty="0"/>
-          </a:p>
-          <a:p>
-            <a:pPr lvl="2"/>
-            <a:r>
-              <a:rPr lang="en-IN" dirty="0"/>
-              <a:t>If landmark visibility &lt; 0.5:</a:t>
-            </a:r>
-          </a:p>
-          <a:p>
-            <a:pPr lvl="2"/>
-            <a:r>
-              <a:rPr lang="en-IN" dirty="0"/>
-              <a:t>(x, y) = </a:t>
-            </a:r>
-            <a:r>
-              <a:rPr lang="en-IN" dirty="0" err="1"/>
-              <a:t>NaN</a:t>
-            </a:r>
-            <a:endParaRPr lang="en-IN" dirty="0"/>
-          </a:p>
-          <a:p>
-            <a:pPr lvl="1"/>
-            <a:endParaRPr lang="en-IN" dirty="0"/>
-          </a:p>
-        </p:txBody>
-      </p:sp>
-    </p:spTree>
-    <p:extLst>
-      <p:ext uri="{BB962C8B-B14F-4D97-AF65-F5344CB8AC3E}">
-        <p14:creationId xmlns:p14="http://schemas.microsoft.com/office/powerpoint/2010/main" val="1911472130"/>
-      </p:ext>
-    </p:extLst>
-  </p:cSld>
-  <p:clrMapOvr>
-    <a:masterClrMapping/>
-  </p:clrMapOvr>
-</p:sld>
-</file>
-
 <file path=ppt/slides/slide18.xml><?xml version="1.0" encoding="utf-8"?>
 <p:sld xmlns:a="http://schemas.openxmlformats.org/drawingml/2006/main" xmlns:r="http://schemas.openxmlformats.org/officeDocument/2006/relationships" xmlns:p="http://schemas.openxmlformats.org/presentationml/2006/main">
   <p:cSld>
@@ -6256,7 +6207,7 @@
           <p:cNvPr id="2" name="Title 1">
             <a:extLst>
               <a:ext uri="{FF2B5EF4-FFF2-40B4-BE49-F238E27FC236}">
-                <a16:creationId xmlns:a16="http://schemas.microsoft.com/office/drawing/2014/main" id="{61081864-C18D-CD94-313C-05D081B85311}"/>
+                <a16:creationId xmlns:a16="http://schemas.microsoft.com/office/drawing/2014/main" id="{6B998CD9-0608-1405-1E04-16235A228432}"/>
               </a:ext>
             </a:extLst>
           </p:cNvPr>
@@ -6292,7 +6243,7 @@
           <p:cNvPr id="3" name="Content Placeholder 2">
             <a:extLst>
               <a:ext uri="{FF2B5EF4-FFF2-40B4-BE49-F238E27FC236}">
-                <a16:creationId xmlns:a16="http://schemas.microsoft.com/office/drawing/2014/main" id="{3DCB1468-7660-6CB1-9483-2CBA12ED1231}"/>
+                <a16:creationId xmlns:a16="http://schemas.microsoft.com/office/drawing/2014/main" id="{93316AD2-6CBA-F4E7-F110-63043A905667}"/>
               </a:ext>
             </a:extLst>
           </p:cNvPr>
@@ -6305,14 +6256,19 @@
         </p:nvSpPr>
         <p:spPr/>
         <p:txBody>
-          <a:bodyPr>
-            <a:normAutofit/>
-          </a:bodyPr>
+          <a:bodyPr/>
           <a:lstStyle/>
           <a:p>
             <a:r>
-              <a:rPr lang="en-US" b="1" dirty="0"/>
-              <a:t>Sample Input &amp; Output</a:t>
+              <a:rPr lang="en-IN" dirty="0"/>
+              <a:t>Step 2: Coordinate Transformation</a:t>
+            </a:r>
+          </a:p>
+          <a:p>
+            <a:pPr lvl="1"/>
+            <a:r>
+              <a:rPr lang="en-IN" b="1" dirty="0"/>
+              <a:t>Transformation Formula</a:t>
             </a:r>
           </a:p>
           <a:p>
@@ -6320,112 +6276,103 @@
               <a:buNone/>
             </a:pPr>
             <a:r>
-              <a:rPr lang="en-US" b="1" dirty="0"/>
-              <a:t>Sample Input:</a:t>
-            </a:r>
-          </a:p>
-          <a:p>
-            <a:pPr marL="457200" lvl="1" indent="0">
+              <a:rPr lang="en-IN" dirty="0"/>
+              <a:t>	For each joint:</a:t>
+            </a:r>
+          </a:p>
+          <a:p>
+            <a:pPr marL="914400" lvl="2" indent="0">
               <a:buNone/>
             </a:pPr>
             <a:r>
-              <a:rPr lang="en-US" dirty="0"/>
+              <a:rPr lang="en-IN" dirty="0"/>
               <a:t>	</a:t>
             </a:r>
-          </a:p>
-          <a:p>
-            <a:pPr marL="457200" lvl="1" indent="0">
+            <a:r>
+              <a:rPr lang="en-IN" dirty="0" err="1"/>
+              <a:t>x_pixel</a:t>
+            </a:r>
+            <a:r>
+              <a:rPr lang="en-IN" dirty="0"/>
+              <a:t> = bbox_x1 + </a:t>
+            </a:r>
+            <a:r>
+              <a:rPr lang="en-IN" dirty="0" err="1"/>
+              <a:t>lm.x</a:t>
+            </a:r>
+            <a:r>
+              <a:rPr lang="en-IN" dirty="0"/>
+              <a:t> × </a:t>
+            </a:r>
+            <a:r>
+              <a:rPr lang="en-IN" dirty="0" err="1"/>
+              <a:t>bbox_width</a:t>
+            </a:r>
+            <a:endParaRPr lang="en-IN" dirty="0"/>
+          </a:p>
+          <a:p>
+            <a:pPr marL="1828800" lvl="4" indent="0">
               <a:buNone/>
             </a:pPr>
-            <a:endParaRPr lang="en-US" dirty="0"/>
-          </a:p>
-          <a:p>
-            <a:pPr marL="457200" lvl="1" indent="0">
-              <a:buNone/>
-            </a:pPr>
-            <a:endParaRPr lang="en-US" dirty="0"/>
-          </a:p>
-          <a:p>
-            <a:pPr marL="457200" lvl="1" indent="0">
-              <a:buNone/>
-            </a:pPr>
-            <a:endParaRPr lang="en-US" b="1" dirty="0"/>
-          </a:p>
-          <a:p>
-            <a:pPr marL="457200" lvl="1" indent="0">
-              <a:buNone/>
-            </a:pPr>
-            <a:r>
-              <a:rPr lang="en-US" b="1" dirty="0"/>
-              <a:t>Sample Output:</a:t>
-            </a:r>
+            <a:r>
+              <a:rPr lang="en-IN" dirty="0" err="1"/>
+              <a:t>y_pixel</a:t>
+            </a:r>
+            <a:r>
+              <a:rPr lang="en-IN" dirty="0"/>
+              <a:t> = bbox_y1 + </a:t>
+            </a:r>
+            <a:r>
+              <a:rPr lang="en-IN" dirty="0" err="1"/>
+              <a:t>lm.y</a:t>
+            </a:r>
+            <a:r>
+              <a:rPr lang="en-IN" dirty="0"/>
+              <a:t> × </a:t>
+            </a:r>
+            <a:r>
+              <a:rPr lang="en-IN" dirty="0" err="1"/>
+              <a:t>bbox_height</a:t>
+            </a:r>
+            <a:endParaRPr lang="en-IN" dirty="0"/>
+          </a:p>
+          <a:p>
+            <a:pPr lvl="1"/>
+            <a:r>
+              <a:rPr lang="en-IN" b="1" dirty="0"/>
+              <a:t>Visibility Rule</a:t>
+            </a:r>
+            <a:endParaRPr lang="en-IN" dirty="0"/>
+          </a:p>
+          <a:p>
+            <a:pPr lvl="2"/>
+            <a:r>
+              <a:rPr lang="en-IN" dirty="0"/>
+              <a:t>If landmark visibility &lt; 0.5:</a:t>
+            </a:r>
+          </a:p>
+          <a:p>
+            <a:pPr lvl="2"/>
+            <a:r>
+              <a:rPr lang="en-IN" dirty="0"/>
+              <a:t>(x, y) = </a:t>
+            </a:r>
+            <a:r>
+              <a:rPr lang="en-IN" dirty="0" err="1"/>
+              <a:t>NaN</a:t>
+            </a:r>
+            <a:endParaRPr lang="en-IN" dirty="0"/>
+          </a:p>
+          <a:p>
+            <a:pPr lvl="1"/>
+            <a:endParaRPr lang="en-IN" dirty="0"/>
           </a:p>
         </p:txBody>
       </p:sp>
-      <p:pic>
-        <p:nvPicPr>
-          <p:cNvPr id="5" name="Picture 4">
-            <a:extLst>
-              <a:ext uri="{FF2B5EF4-FFF2-40B4-BE49-F238E27FC236}">
-                <a16:creationId xmlns:a16="http://schemas.microsoft.com/office/drawing/2014/main" id="{0123AC6F-1C92-F5C9-4DD1-2C6E6C1FD56E}"/>
-              </a:ext>
-            </a:extLst>
-          </p:cNvPr>
-          <p:cNvPicPr>
-            <a:picLocks noChangeAspect="1"/>
-          </p:cNvPicPr>
-          <p:nvPr/>
-        </p:nvPicPr>
-        <p:blipFill>
-          <a:blip r:embed="rId2"/>
-          <a:stretch>
-            <a:fillRect/>
-          </a:stretch>
-        </p:blipFill>
-        <p:spPr>
-          <a:xfrm>
-            <a:off x="2015253" y="2714813"/>
-            <a:ext cx="2516989" cy="1428373"/>
-          </a:xfrm>
-          <a:prstGeom prst="rect">
-            <a:avLst/>
-          </a:prstGeom>
-        </p:spPr>
-      </p:pic>
-      <p:pic>
-        <p:nvPicPr>
-          <p:cNvPr id="7" name="Picture 6">
-            <a:extLst>
-              <a:ext uri="{FF2B5EF4-FFF2-40B4-BE49-F238E27FC236}">
-                <a16:creationId xmlns:a16="http://schemas.microsoft.com/office/drawing/2014/main" id="{DFE4D8CD-05D6-E016-76B4-A670D8EAF936}"/>
-              </a:ext>
-            </a:extLst>
-          </p:cNvPr>
-          <p:cNvPicPr>
-            <a:picLocks noChangeAspect="1"/>
-          </p:cNvPicPr>
-          <p:nvPr/>
-        </p:nvPicPr>
-        <p:blipFill>
-          <a:blip r:embed="rId3"/>
-          <a:stretch>
-            <a:fillRect/>
-          </a:stretch>
-        </p:blipFill>
-        <p:spPr>
-          <a:xfrm>
-            <a:off x="1951642" y="4818114"/>
-            <a:ext cx="2945967" cy="1193071"/>
-          </a:xfrm>
-          <a:prstGeom prst="rect">
-            <a:avLst/>
-          </a:prstGeom>
-        </p:spPr>
-      </p:pic>
     </p:spTree>
     <p:extLst>
       <p:ext uri="{BB962C8B-B14F-4D97-AF65-F5344CB8AC3E}">
-        <p14:creationId xmlns:p14="http://schemas.microsoft.com/office/powerpoint/2010/main" val="4019946074"/>
+        <p14:creationId xmlns:p14="http://schemas.microsoft.com/office/powerpoint/2010/main" val="1911472130"/>
       </p:ext>
     </p:extLst>
   </p:cSld>
@@ -6457,7 +6404,7 @@
           <p:cNvPr id="2" name="Title 1">
             <a:extLst>
               <a:ext uri="{FF2B5EF4-FFF2-40B4-BE49-F238E27FC236}">
-                <a16:creationId xmlns:a16="http://schemas.microsoft.com/office/drawing/2014/main" id="{38CD3F19-F63D-C5DE-8464-C3C61F9D7500}"/>
+                <a16:creationId xmlns:a16="http://schemas.microsoft.com/office/drawing/2014/main" id="{61081864-C18D-CD94-313C-05D081B85311}"/>
               </a:ext>
             </a:extLst>
           </p:cNvPr>
@@ -6475,7 +6422,15 @@
           <a:p>
             <a:r>
               <a:rPr lang="en-IN" dirty="0"/>
-              <a:t>9A Module Overview &amp; Block Diagram</a:t>
+              <a:t>8B Algorithm Details (</a:t>
+            </a:r>
+            <a:r>
+              <a:rPr lang="en-IN" dirty="0" err="1"/>
+              <a:t>cont</a:t>
+            </a:r>
+            <a:r>
+              <a:rPr lang="en-IN" dirty="0"/>
+              <a:t>)</a:t>
             </a:r>
           </a:p>
         </p:txBody>
@@ -6485,7 +6440,7 @@
           <p:cNvPr id="3" name="Content Placeholder 2">
             <a:extLst>
               <a:ext uri="{FF2B5EF4-FFF2-40B4-BE49-F238E27FC236}">
-                <a16:creationId xmlns:a16="http://schemas.microsoft.com/office/drawing/2014/main" id="{74F9224E-2F1E-106F-5A0F-4D357858E919}"/>
+                <a16:creationId xmlns:a16="http://schemas.microsoft.com/office/drawing/2014/main" id="{3DCB1468-7660-6CB1-9483-2CBA12ED1231}"/>
               </a:ext>
             </a:extLst>
           </p:cNvPr>
@@ -6499,13 +6454,13 @@
         <p:spPr/>
         <p:txBody>
           <a:bodyPr>
-            <a:normAutofit fontScale="40000" lnSpcReduction="20000"/>
+            <a:normAutofit/>
           </a:bodyPr>
           <a:lstStyle/>
           <a:p>
             <a:r>
               <a:rPr lang="en-US" b="1" dirty="0"/>
-              <a:t>Module Name</a:t>
+              <a:t>Sample Input &amp; Output</a:t>
             </a:r>
           </a:p>
           <a:p>
@@ -6514,135 +6469,111 @@
             </a:pPr>
             <a:r>
               <a:rPr lang="en-US" b="1" dirty="0"/>
-              <a:t>COCO-17 Pose Canonicalization and Temporal Cleaning</a:t>
-            </a:r>
+              <a:t>Sample Input:</a:t>
+            </a:r>
+          </a:p>
+          <a:p>
+            <a:pPr marL="457200" lvl="1" indent="0">
+              <a:buNone/>
+            </a:pPr>
+            <a:r>
+              <a:rPr lang="en-US" dirty="0"/>
+              <a:t>	</a:t>
+            </a:r>
+          </a:p>
+          <a:p>
+            <a:pPr marL="457200" lvl="1" indent="0">
+              <a:buNone/>
+            </a:pPr>
             <a:endParaRPr lang="en-US" dirty="0"/>
           </a:p>
           <a:p>
+            <a:pPr marL="457200" lvl="1" indent="0">
+              <a:buNone/>
+            </a:pPr>
+            <a:endParaRPr lang="en-US" dirty="0"/>
+          </a:p>
+          <a:p>
+            <a:pPr marL="457200" lvl="1" indent="0">
+              <a:buNone/>
+            </a:pPr>
+            <a:endParaRPr lang="en-US" b="1" dirty="0"/>
+          </a:p>
+          <a:p>
+            <a:pPr marL="457200" lvl="1" indent="0">
+              <a:buNone/>
+            </a:pPr>
             <a:r>
               <a:rPr lang="en-US" b="1" dirty="0"/>
-              <a:t>Purpose</a:t>
-            </a:r>
-          </a:p>
-          <a:p>
-            <a:pPr lvl="1"/>
-            <a:r>
-              <a:rPr lang="en-US" dirty="0"/>
-              <a:t>Convert raw COCO-17 pose to </a:t>
-            </a:r>
-            <a:r>
-              <a:rPr lang="en-US" b="1" dirty="0"/>
-              <a:t>stable, normalized, and noise-free pose sequence</a:t>
-            </a:r>
-            <a:r>
-              <a:rPr lang="en-US" dirty="0"/>
-              <a:t> for temporal alignment and error analysis.</a:t>
-            </a:r>
-          </a:p>
-          <a:p>
-            <a:pPr marL="0" indent="0">
-              <a:buNone/>
-            </a:pPr>
-            <a:endParaRPr lang="en-IN" sz="2300" dirty="0"/>
-          </a:p>
-          <a:p>
-            <a:pPr marL="0" indent="0">
-              <a:buNone/>
-            </a:pPr>
-            <a:r>
-              <a:rPr lang="en-IN" sz="2300" dirty="0"/>
-              <a:t>Block diagram:</a:t>
-            </a:r>
-          </a:p>
-          <a:p>
-            <a:r>
-              <a:rPr lang="en-IN" sz="2300" dirty="0"/>
-              <a:t>Raw COCO-17 Pose Sequence</a:t>
-            </a:r>
-          </a:p>
-          <a:p>
-            <a:r>
-              <a:rPr lang="en-IN" sz="2300" dirty="0"/>
-              <a:t>            ↓</a:t>
-            </a:r>
-          </a:p>
-          <a:p>
-            <a:r>
-              <a:rPr lang="en-IN" sz="2300" dirty="0"/>
-              <a:t>Temporal Interpolation</a:t>
-            </a:r>
-          </a:p>
-          <a:p>
-            <a:r>
-              <a:rPr lang="en-IN" sz="2300" dirty="0"/>
-              <a:t>            ↓</a:t>
-            </a:r>
-          </a:p>
-          <a:p>
-            <a:r>
-              <a:rPr lang="en-IN" sz="2300" dirty="0"/>
-              <a:t>Pelvis </a:t>
-            </a:r>
-            <a:r>
-              <a:rPr lang="en-IN" sz="2300" dirty="0" err="1"/>
-              <a:t>Centering</a:t>
-            </a:r>
-            <a:endParaRPr lang="en-IN" sz="2300" dirty="0"/>
-          </a:p>
-          <a:p>
-            <a:r>
-              <a:rPr lang="en-IN" sz="2300" dirty="0"/>
-              <a:t>            ↓</a:t>
-            </a:r>
-          </a:p>
-          <a:p>
-            <a:r>
-              <a:rPr lang="en-IN" sz="2300" dirty="0"/>
-              <a:t>Scale Normalization</a:t>
-            </a:r>
-          </a:p>
-          <a:p>
-            <a:r>
-              <a:rPr lang="en-IN" sz="2300" dirty="0"/>
-              <a:t>            ↓</a:t>
-            </a:r>
-          </a:p>
-          <a:p>
-            <a:r>
-              <a:rPr lang="en-IN" sz="2300" dirty="0"/>
-              <a:t>Outlier Suppression</a:t>
-            </a:r>
-          </a:p>
-          <a:p>
-            <a:r>
-              <a:rPr lang="en-IN" sz="2300" dirty="0"/>
-              <a:t>            ↓</a:t>
-            </a:r>
-          </a:p>
-          <a:p>
-            <a:r>
-              <a:rPr lang="en-IN" sz="2300" dirty="0"/>
-              <a:t>EMA Smoothing</a:t>
-            </a:r>
-          </a:p>
-          <a:p>
-            <a:r>
-              <a:rPr lang="en-IN" sz="2300" dirty="0"/>
-              <a:t>            ↓</a:t>
-            </a:r>
-          </a:p>
-          <a:p>
-            <a:r>
-              <a:rPr lang="en-IN" sz="2300" dirty="0"/>
-              <a:t>Cleaned &amp; Normalized COCO-17 Pose</a:t>
+              <a:t>Sample Output:</a:t>
             </a:r>
           </a:p>
         </p:txBody>
       </p:sp>
+      <p:pic>
+        <p:nvPicPr>
+          <p:cNvPr id="5" name="Picture 4">
+            <a:extLst>
+              <a:ext uri="{FF2B5EF4-FFF2-40B4-BE49-F238E27FC236}">
+                <a16:creationId xmlns:a16="http://schemas.microsoft.com/office/drawing/2014/main" id="{0123AC6F-1C92-F5C9-4DD1-2C6E6C1FD56E}"/>
+              </a:ext>
+            </a:extLst>
+          </p:cNvPr>
+          <p:cNvPicPr>
+            <a:picLocks noChangeAspect="1"/>
+          </p:cNvPicPr>
+          <p:nvPr/>
+        </p:nvPicPr>
+        <p:blipFill>
+          <a:blip r:embed="rId2"/>
+          <a:stretch>
+            <a:fillRect/>
+          </a:stretch>
+        </p:blipFill>
+        <p:spPr>
+          <a:xfrm>
+            <a:off x="2015253" y="2714813"/>
+            <a:ext cx="2516989" cy="1428373"/>
+          </a:xfrm>
+          <a:prstGeom prst="rect">
+            <a:avLst/>
+          </a:prstGeom>
+        </p:spPr>
+      </p:pic>
+      <p:pic>
+        <p:nvPicPr>
+          <p:cNvPr id="7" name="Picture 6">
+            <a:extLst>
+              <a:ext uri="{FF2B5EF4-FFF2-40B4-BE49-F238E27FC236}">
+                <a16:creationId xmlns:a16="http://schemas.microsoft.com/office/drawing/2014/main" id="{DFE4D8CD-05D6-E016-76B4-A670D8EAF936}"/>
+              </a:ext>
+            </a:extLst>
+          </p:cNvPr>
+          <p:cNvPicPr>
+            <a:picLocks noChangeAspect="1"/>
+          </p:cNvPicPr>
+          <p:nvPr/>
+        </p:nvPicPr>
+        <p:blipFill>
+          <a:blip r:embed="rId3"/>
+          <a:stretch>
+            <a:fillRect/>
+          </a:stretch>
+        </p:blipFill>
+        <p:spPr>
+          <a:xfrm>
+            <a:off x="1951642" y="4818114"/>
+            <a:ext cx="2945967" cy="1193071"/>
+          </a:xfrm>
+          <a:prstGeom prst="rect">
+            <a:avLst/>
+          </a:prstGeom>
+        </p:spPr>
+      </p:pic>
     </p:spTree>
     <p:extLst>
       <p:ext uri="{BB962C8B-B14F-4D97-AF65-F5344CB8AC3E}">
-        <p14:creationId xmlns:p14="http://schemas.microsoft.com/office/powerpoint/2010/main" val="1894504363"/>
+        <p14:creationId xmlns:p14="http://schemas.microsoft.com/office/powerpoint/2010/main" val="4019946074"/>
       </p:ext>
     </p:extLst>
   </p:cSld>
@@ -7304,6 +7235,223 @@
 </file>
 
 <file path=ppt/slides/slide20.xml><?xml version="1.0" encoding="utf-8"?>
+<p:sld xmlns:a="http://schemas.openxmlformats.org/drawingml/2006/main" xmlns:r="http://schemas.openxmlformats.org/officeDocument/2006/relationships" xmlns:p="http://schemas.openxmlformats.org/presentationml/2006/main">
+  <p:cSld>
+    <p:spTree>
+      <p:nvGrpSpPr>
+        <p:cNvPr id="1" name=""/>
+        <p:cNvGrpSpPr/>
+        <p:nvPr/>
+      </p:nvGrpSpPr>
+      <p:grpSpPr>
+        <a:xfrm>
+          <a:off x="0" y="0"/>
+          <a:ext cx="0" cy="0"/>
+          <a:chOff x="0" y="0"/>
+          <a:chExt cx="0" cy="0"/>
+        </a:xfrm>
+      </p:grpSpPr>
+      <p:sp>
+        <p:nvSpPr>
+          <p:cNvPr id="2" name="Title 1">
+            <a:extLst>
+              <a:ext uri="{FF2B5EF4-FFF2-40B4-BE49-F238E27FC236}">
+                <a16:creationId xmlns:a16="http://schemas.microsoft.com/office/drawing/2014/main" id="{38CD3F19-F63D-C5DE-8464-C3C61F9D7500}"/>
+              </a:ext>
+            </a:extLst>
+          </p:cNvPr>
+          <p:cNvSpPr>
+            <a:spLocks noGrp="1"/>
+          </p:cNvSpPr>
+          <p:nvPr>
+            <p:ph type="title"/>
+          </p:nvPr>
+        </p:nvSpPr>
+        <p:spPr/>
+        <p:txBody>
+          <a:bodyPr/>
+          <a:lstStyle/>
+          <a:p>
+            <a:r>
+              <a:rPr lang="en-IN" dirty="0"/>
+              <a:t>9A Module Overview &amp; Block Diagram</a:t>
+            </a:r>
+          </a:p>
+        </p:txBody>
+      </p:sp>
+      <p:sp>
+        <p:nvSpPr>
+          <p:cNvPr id="3" name="Content Placeholder 2">
+            <a:extLst>
+              <a:ext uri="{FF2B5EF4-FFF2-40B4-BE49-F238E27FC236}">
+                <a16:creationId xmlns:a16="http://schemas.microsoft.com/office/drawing/2014/main" id="{74F9224E-2F1E-106F-5A0F-4D357858E919}"/>
+              </a:ext>
+            </a:extLst>
+          </p:cNvPr>
+          <p:cNvSpPr>
+            <a:spLocks noGrp="1"/>
+          </p:cNvSpPr>
+          <p:nvPr>
+            <p:ph idx="1"/>
+          </p:nvPr>
+        </p:nvSpPr>
+        <p:spPr/>
+        <p:txBody>
+          <a:bodyPr>
+            <a:normAutofit fontScale="40000" lnSpcReduction="20000"/>
+          </a:bodyPr>
+          <a:lstStyle/>
+          <a:p>
+            <a:r>
+              <a:rPr lang="en-US" b="1" dirty="0"/>
+              <a:t>Module Name</a:t>
+            </a:r>
+          </a:p>
+          <a:p>
+            <a:pPr marL="457200" lvl="1" indent="0">
+              <a:buNone/>
+            </a:pPr>
+            <a:r>
+              <a:rPr lang="en-US" b="1" dirty="0"/>
+              <a:t>COCO-17 Pose Canonicalization and Temporal Cleaning</a:t>
+            </a:r>
+            <a:endParaRPr lang="en-US" dirty="0"/>
+          </a:p>
+          <a:p>
+            <a:r>
+              <a:rPr lang="en-US" b="1" dirty="0"/>
+              <a:t>Purpose</a:t>
+            </a:r>
+          </a:p>
+          <a:p>
+            <a:pPr lvl="1"/>
+            <a:r>
+              <a:rPr lang="en-US" dirty="0"/>
+              <a:t>Convert raw COCO-17 pose to </a:t>
+            </a:r>
+            <a:r>
+              <a:rPr lang="en-US" b="1" dirty="0"/>
+              <a:t>stable, normalized, and noise-free pose sequence</a:t>
+            </a:r>
+            <a:r>
+              <a:rPr lang="en-US" dirty="0"/>
+              <a:t> for temporal alignment and error analysis.</a:t>
+            </a:r>
+          </a:p>
+          <a:p>
+            <a:pPr marL="0" indent="0">
+              <a:buNone/>
+            </a:pPr>
+            <a:endParaRPr lang="en-IN" sz="2300" dirty="0"/>
+          </a:p>
+          <a:p>
+            <a:pPr marL="0" indent="0">
+              <a:buNone/>
+            </a:pPr>
+            <a:r>
+              <a:rPr lang="en-IN" sz="2300" dirty="0"/>
+              <a:t>Block diagram:</a:t>
+            </a:r>
+          </a:p>
+          <a:p>
+            <a:r>
+              <a:rPr lang="en-IN" sz="2300" dirty="0"/>
+              <a:t>Raw COCO-17 Pose Sequence</a:t>
+            </a:r>
+          </a:p>
+          <a:p>
+            <a:r>
+              <a:rPr lang="en-IN" sz="2300" dirty="0"/>
+              <a:t>            ↓</a:t>
+            </a:r>
+          </a:p>
+          <a:p>
+            <a:r>
+              <a:rPr lang="en-IN" sz="2300" dirty="0"/>
+              <a:t>Temporal Interpolation</a:t>
+            </a:r>
+          </a:p>
+          <a:p>
+            <a:r>
+              <a:rPr lang="en-IN" sz="2300" dirty="0"/>
+              <a:t>            ↓</a:t>
+            </a:r>
+          </a:p>
+          <a:p>
+            <a:r>
+              <a:rPr lang="en-IN" sz="2300" dirty="0"/>
+              <a:t>Pelvis </a:t>
+            </a:r>
+            <a:r>
+              <a:rPr lang="en-IN" sz="2300" dirty="0" err="1"/>
+              <a:t>Centering</a:t>
+            </a:r>
+            <a:endParaRPr lang="en-IN" sz="2300" dirty="0"/>
+          </a:p>
+          <a:p>
+            <a:r>
+              <a:rPr lang="en-IN" sz="2300" dirty="0"/>
+              <a:t>            ↓</a:t>
+            </a:r>
+          </a:p>
+          <a:p>
+            <a:r>
+              <a:rPr lang="en-IN" sz="2300" dirty="0"/>
+              <a:t>Scale Normalization</a:t>
+            </a:r>
+          </a:p>
+          <a:p>
+            <a:r>
+              <a:rPr lang="en-IN" sz="2300" dirty="0"/>
+              <a:t>            ↓</a:t>
+            </a:r>
+          </a:p>
+          <a:p>
+            <a:r>
+              <a:rPr lang="en-IN" sz="2300" dirty="0"/>
+              <a:t>Outlier Suppression</a:t>
+            </a:r>
+          </a:p>
+          <a:p>
+            <a:r>
+              <a:rPr lang="en-IN" sz="2300" dirty="0"/>
+              <a:t>            ↓</a:t>
+            </a:r>
+          </a:p>
+          <a:p>
+            <a:r>
+              <a:rPr lang="en-IN" sz="2300" dirty="0"/>
+              <a:t>EMA Smoothing</a:t>
+            </a:r>
+          </a:p>
+          <a:p>
+            <a:r>
+              <a:rPr lang="en-IN" sz="2300" dirty="0"/>
+              <a:t>            ↓</a:t>
+            </a:r>
+          </a:p>
+          <a:p>
+            <a:r>
+              <a:rPr lang="en-IN" sz="2300" dirty="0"/>
+              <a:t>Cleaned &amp; Normalized COCO-17 Pose</a:t>
+            </a:r>
+          </a:p>
+        </p:txBody>
+      </p:sp>
+    </p:spTree>
+    <p:extLst>
+      <p:ext uri="{BB962C8B-B14F-4D97-AF65-F5344CB8AC3E}">
+        <p14:creationId xmlns:p14="http://schemas.microsoft.com/office/powerpoint/2010/main" val="1894504363"/>
+      </p:ext>
+    </p:extLst>
+  </p:cSld>
+  <p:clrMapOvr>
+    <a:masterClrMapping/>
+  </p:clrMapOvr>
+</p:sld>
+</file>
+
+<file path=ppt/slides/slide21.xml><?xml version="1.0" encoding="utf-8"?>
 <p:sld xmlns:a="http://schemas.openxmlformats.org/drawingml/2006/main" xmlns:r="http://schemas.openxmlformats.org/officeDocument/2006/relationships" xmlns:p="http://schemas.openxmlformats.org/presentationml/2006/main">
   <p:cSld>
     <p:spTree>
@@ -11600,7 +11748,7 @@
           <p:cNvPr id="2" name="Title 1">
             <a:extLst>
               <a:ext uri="{FF2B5EF4-FFF2-40B4-BE49-F238E27FC236}">
-                <a16:creationId xmlns:a16="http://schemas.microsoft.com/office/drawing/2014/main" id="{C1A07FBB-A56A-64F2-95E8-B5CC009B7CEB}"/>
+                <a16:creationId xmlns:a16="http://schemas.microsoft.com/office/drawing/2014/main" id="{900B042A-0666-B2B4-C723-1DD86C1D61F5}"/>
               </a:ext>
             </a:extLst>
           </p:cNvPr>
@@ -11617,9 +11765,18 @@
           <a:lstStyle/>
           <a:p>
             <a:r>
+              <a:rPr lang="en-US" dirty="0"/>
+              <a:t>6. </a:t>
+            </a:r>
+            <a:r>
               <a:rPr lang="en-IN" dirty="0"/>
-              <a:t>6. Modules (POSE EXTRACTION &amp; CLEANING)</a:t>
-            </a:r>
+              <a:t>Modules</a:t>
+            </a:r>
+            <a:r>
+              <a:rPr lang="en-US" dirty="0"/>
+              <a:t> </a:t>
+            </a:r>
+            <a:endParaRPr lang="en-IN" dirty="0"/>
           </a:p>
         </p:txBody>
       </p:sp>
@@ -11628,7 +11785,7 @@
           <p:cNvPr id="3" name="Content Placeholder 2">
             <a:extLst>
               <a:ext uri="{FF2B5EF4-FFF2-40B4-BE49-F238E27FC236}">
-                <a16:creationId xmlns:a16="http://schemas.microsoft.com/office/drawing/2014/main" id="{673FC6C7-1A10-314F-B44B-D306091E0A0D}"/>
+                <a16:creationId xmlns:a16="http://schemas.microsoft.com/office/drawing/2014/main" id="{02B2DEE0-08D8-3661-6B64-B1A95E77C2A5}"/>
               </a:ext>
             </a:extLst>
           </p:cNvPr>
@@ -11641,60 +11798,182 @@
         </p:nvSpPr>
         <p:spPr/>
         <p:txBody>
-          <a:bodyPr/>
+          <a:bodyPr>
+            <a:normAutofit fontScale="92500" lnSpcReduction="10000"/>
+          </a:bodyPr>
           <a:lstStyle/>
           <a:p>
-            <a:pPr marL="0" indent="0">
-              <a:buNone/>
+            <a:pPr marL="457200" indent="-457200">
+              <a:buFont typeface="+mj-lt"/>
+              <a:buAutoNum type="alphaUcPeriod"/>
             </a:pPr>
             <a:r>
-              <a:rPr lang="en-IN" dirty="0"/>
-              <a:t>Level 1 POSE EXTRACTION &amp; CLEANING</a:t>
-            </a:r>
-          </a:p>
-          <a:p>
+              <a:rPr lang="en-US" sz="2000" dirty="0"/>
+              <a:t> Pose Extraction &amp; Cleaning</a:t>
+            </a:r>
+          </a:p>
+          <a:p>
+            <a:pPr marL="971550" lvl="1" indent="-514350">
+              <a:buFont typeface="+mj-lt"/>
+              <a:buAutoNum type="romanLcPeriod"/>
+            </a:pPr>
+            <a:r>
+              <a:rPr lang="en-US" sz="1600" dirty="0"/>
+              <a:t>YOLO PERSON DETECTION (RAIDER)</a:t>
+            </a:r>
+          </a:p>
+          <a:p>
+            <a:pPr marL="971550" lvl="1" indent="-514350">
+              <a:buFont typeface="+mj-lt"/>
+              <a:buAutoNum type="romanLcPeriod"/>
+            </a:pPr>
+            <a:r>
+              <a:rPr lang="en-US" sz="1600" dirty="0"/>
+              <a:t>POSE ESTIMATION</a:t>
+            </a:r>
+          </a:p>
+          <a:p>
+            <a:pPr marL="971550" lvl="1" indent="-514350">
+              <a:buFont typeface="+mj-lt"/>
+              <a:buAutoNum type="romanLcPeriod"/>
+            </a:pPr>
+            <a:r>
+              <a:rPr lang="en-US" sz="1600" dirty="0"/>
+              <a:t>FORMAT CONVERTION</a:t>
+            </a:r>
+          </a:p>
+          <a:p>
+            <a:pPr marL="971550" lvl="1" indent="-514350">
+              <a:buFont typeface="+mj-lt"/>
+              <a:buAutoNum type="romanLcPeriod"/>
+            </a:pPr>
+            <a:r>
+              <a:rPr lang="en-US" sz="1600" dirty="0"/>
+              <a:t>DATA CANONICALIZATION</a:t>
+            </a:r>
+          </a:p>
+          <a:p>
+            <a:pPr marL="457200" indent="-457200">
+              <a:buFont typeface="+mj-lt"/>
+              <a:buAutoNum type="alphaUcPeriod"/>
+            </a:pPr>
+            <a:r>
+              <a:rPr lang="en-US" sz="2000" dirty="0"/>
+              <a:t>TEMPORAL ALIGNMENT</a:t>
+            </a:r>
+          </a:p>
+          <a:p>
+            <a:pPr marL="971550" lvl="1" indent="-514350">
+              <a:buFont typeface="+mj-lt"/>
+              <a:buAutoNum type="romanLcPeriod"/>
+            </a:pPr>
+            <a:r>
+              <a:rPr lang="en-US" sz="1600" dirty="0"/>
+              <a:t>PELVIS TRAJECTORY EXTRACTION</a:t>
+            </a:r>
+          </a:p>
+          <a:p>
+            <a:pPr marL="971550" lvl="1" indent="-514350">
+              <a:buFont typeface="+mj-lt"/>
+              <a:buAutoNum type="romanLcPeriod"/>
+            </a:pPr>
+            <a:r>
+              <a:rPr lang="en-US" sz="1600" dirty="0"/>
+              <a:t>DYNAMIC TIME WARPING</a:t>
+            </a:r>
+          </a:p>
+          <a:p>
+            <a:pPr marL="971550" lvl="1" indent="-514350">
+              <a:buFont typeface="+mj-lt"/>
+              <a:buAutoNum type="romanLcPeriod"/>
+            </a:pPr>
+            <a:r>
+              <a:rPr lang="en-US" sz="1600" dirty="0"/>
+              <a:t>ALIGNED SQUENCE GENERATOR</a:t>
+            </a:r>
+          </a:p>
+          <a:p>
+            <a:pPr marL="457200" indent="-457200">
+              <a:buFont typeface="+mj-lt"/>
+              <a:buAutoNum type="alphaUcPeriod"/>
+            </a:pPr>
+            <a:r>
+              <a:rPr lang="en-US" sz="2000" dirty="0"/>
+              <a:t>JOINT ERROR ANALYSIS</a:t>
+            </a:r>
+          </a:p>
+          <a:p>
+            <a:pPr marL="914400" lvl="1" indent="-457200">
+              <a:buFont typeface="+mj-lt"/>
+              <a:buAutoNum type="romanUcPeriod"/>
+            </a:pPr>
+            <a:r>
+              <a:rPr lang="en-US" sz="1600" dirty="0"/>
+              <a:t>ERROR COMPUTATION ENGINE</a:t>
+            </a:r>
+          </a:p>
+          <a:p>
+            <a:pPr marL="914400" lvl="1" indent="-457200">
+              <a:buFont typeface="+mj-lt"/>
+              <a:buAutoNum type="romanUcPeriod"/>
+            </a:pPr>
+            <a:r>
+              <a:rPr lang="en-US" sz="1600" dirty="0"/>
+              <a:t>STATISTICAL AGRIGATION MODULE</a:t>
+            </a:r>
+          </a:p>
+          <a:p>
+            <a:pPr marL="914400" lvl="1" indent="-457200">
+              <a:buFont typeface="+mj-lt"/>
+              <a:buAutoNum type="romanUcPeriod"/>
+            </a:pPr>
+            <a:r>
+              <a:rPr lang="en-US" sz="1600" dirty="0"/>
+              <a:t>DATA SERIALIZATION</a:t>
+            </a:r>
+          </a:p>
+          <a:p>
+            <a:pPr marL="457200" indent="-457200">
+              <a:buFont typeface="+mj-lt"/>
+              <a:buAutoNum type="alphaUcPeriod"/>
+            </a:pPr>
+            <a:r>
+              <a:rPr lang="en-US" sz="2000" dirty="0"/>
+              <a:t>SIMLARITY SCORE</a:t>
+            </a:r>
+            <a:endParaRPr lang="en-US" dirty="0"/>
+          </a:p>
+          <a:p>
+            <a:pPr marL="914400" lvl="1" indent="-457200">
+              <a:buFont typeface="+mj-lt"/>
+              <a:buAutoNum type="romanUcPeriod"/>
+            </a:pPr>
+            <a:r>
+              <a:rPr lang="en-US" sz="1600" dirty="0"/>
+              <a:t>SIMILARITY SCORE ENGINE</a:t>
+            </a:r>
+          </a:p>
+          <a:p>
+            <a:pPr marL="914400" lvl="1" indent="-457200">
+              <a:buFont typeface="+mj-lt"/>
+              <a:buAutoNum type="romanUcPeriod"/>
+            </a:pPr>
+            <a:endParaRPr lang="en-US" sz="1600" dirty="0"/>
+          </a:p>
+          <a:p>
+            <a:pPr lvl="1"/>
             <a:endParaRPr lang="en-IN" dirty="0"/>
           </a:p>
           <a:p>
-            <a:r>
-              <a:rPr lang="en-IN" dirty="0"/>
-              <a:t>MODULES :</a:t>
-            </a:r>
-          </a:p>
-          <a:p>
             <a:pPr lvl="1"/>
-            <a:r>
-              <a:rPr lang="en-IN" dirty="0"/>
-              <a:t>YOLO PERSON DETECTION</a:t>
-            </a:r>
-          </a:p>
-          <a:p>
-            <a:pPr lvl="1"/>
-            <a:r>
-              <a:rPr lang="en-IN" dirty="0"/>
-              <a:t>POSE ESTIMATION</a:t>
-            </a:r>
-          </a:p>
-          <a:p>
-            <a:pPr lvl="1"/>
-            <a:r>
-              <a:rPr lang="en-IN" dirty="0"/>
-              <a:t>FORMAT CONVERTION</a:t>
-            </a:r>
-          </a:p>
-          <a:p>
-            <a:pPr lvl="1"/>
-            <a:r>
-              <a:rPr lang="en-IN" dirty="0"/>
-              <a:t>DATA CANONICALIZATION &amp; CLEANING</a:t>
-            </a:r>
+            <a:endParaRPr lang="en-IN" dirty="0"/>
           </a:p>
         </p:txBody>
       </p:sp>
     </p:spTree>
     <p:extLst>
       <p:ext uri="{BB962C8B-B14F-4D97-AF65-F5344CB8AC3E}">
-        <p14:creationId xmlns:p14="http://schemas.microsoft.com/office/powerpoint/2010/main" val="225397121"/>
+        <p14:creationId xmlns:p14="http://schemas.microsoft.com/office/powerpoint/2010/main" val="4157859374"/>
       </p:ext>
     </p:extLst>
   </p:cSld>
@@ -11726,7 +12005,7 @@
           <p:cNvPr id="2" name="Title 1">
             <a:extLst>
               <a:ext uri="{FF2B5EF4-FFF2-40B4-BE49-F238E27FC236}">
-                <a16:creationId xmlns:a16="http://schemas.microsoft.com/office/drawing/2014/main" id="{D8EDB180-F318-6BD9-DCBE-BE44604AB8C0}"/>
+                <a16:creationId xmlns:a16="http://schemas.microsoft.com/office/drawing/2014/main" id="{C1A07FBB-A56A-64F2-95E8-B5CC009B7CEB}"/>
               </a:ext>
             </a:extLst>
           </p:cNvPr>
@@ -11743,10 +12022,9 @@
           <a:lstStyle/>
           <a:p>
             <a:r>
-              <a:rPr lang="en-US" dirty="0"/>
-              <a:t>6A – Module Overview &amp; Block Diagram</a:t>
-            </a:r>
-            <a:endParaRPr lang="en-IN" dirty="0"/>
+              <a:rPr lang="en-IN" dirty="0"/>
+              <a:t>6. Modules (POSE EXTRACTION &amp; CLEANING)</a:t>
+            </a:r>
           </a:p>
         </p:txBody>
       </p:sp>
@@ -11755,7 +12033,7 @@
           <p:cNvPr id="3" name="Content Placeholder 2">
             <a:extLst>
               <a:ext uri="{FF2B5EF4-FFF2-40B4-BE49-F238E27FC236}">
-                <a16:creationId xmlns:a16="http://schemas.microsoft.com/office/drawing/2014/main" id="{933BB3F7-04E5-492E-A91D-78AE0436D5A3}"/>
+                <a16:creationId xmlns:a16="http://schemas.microsoft.com/office/drawing/2014/main" id="{673FC6C7-1A10-314F-B44B-D306091E0A0D}"/>
               </a:ext>
             </a:extLst>
           </p:cNvPr>
@@ -11771,77 +12049,57 @@
           <a:bodyPr/>
           <a:lstStyle/>
           <a:p>
-            <a:r>
-              <a:rPr lang="en-US" b="1" dirty="0"/>
-              <a:t>Module:</a:t>
+            <a:pPr marL="0" indent="0">
+              <a:buNone/>
+            </a:pPr>
+            <a:r>
+              <a:rPr lang="en-IN" dirty="0"/>
+              <a:t>Level 1 POSE EXTRACTION &amp; CLEANING</a:t>
+            </a:r>
+          </a:p>
+          <a:p>
+            <a:endParaRPr lang="en-IN" dirty="0"/>
+          </a:p>
+          <a:p>
+            <a:r>
+              <a:rPr lang="en-IN" dirty="0"/>
+              <a:t>MODULES :</a:t>
             </a:r>
           </a:p>
           <a:p>
             <a:pPr lvl="1"/>
             <a:r>
-              <a:rPr lang="en-US" b="1" dirty="0"/>
-              <a:t>YOLO-Based Person Detection and Tracking</a:t>
-            </a:r>
-            <a:endParaRPr lang="en-US" dirty="0"/>
-          </a:p>
-          <a:p>
-            <a:r>
-              <a:rPr lang="en-US" b="1" dirty="0"/>
-              <a:t>Purpose: </a:t>
+              <a:rPr lang="en-IN" dirty="0"/>
+              <a:t>YOLO PERSON DETECTION</a:t>
             </a:r>
           </a:p>
           <a:p>
             <a:pPr lvl="1"/>
             <a:r>
-              <a:rPr lang="en-US" dirty="0"/>
-              <a:t>tracks the active Kabaddi player (raider) from raw multi-person video.</a:t>
-            </a:r>
-          </a:p>
-          <a:p>
-            <a:endParaRPr lang="en-IN" dirty="0"/>
+              <a:rPr lang="en-IN" dirty="0"/>
+              <a:t>POSE ESTIMATION</a:t>
+            </a:r>
+          </a:p>
+          <a:p>
+            <a:pPr lvl="1"/>
+            <a:r>
+              <a:rPr lang="en-IN" dirty="0"/>
+              <a:t>FORMAT CONVERTION</a:t>
+            </a:r>
+          </a:p>
+          <a:p>
+            <a:pPr lvl="1"/>
+            <a:r>
+              <a:rPr lang="en-IN" dirty="0"/>
+              <a:t>DATA CANONICALIZATION &amp; CLEANING</a:t>
+            </a:r>
           </a:p>
         </p:txBody>
       </p:sp>
-      <p:pic>
-        <p:nvPicPr>
-          <p:cNvPr id="16" name="Picture 15">
-            <a:extLst>
-              <a:ext uri="{FF2B5EF4-FFF2-40B4-BE49-F238E27FC236}">
-                <a16:creationId xmlns:a16="http://schemas.microsoft.com/office/drawing/2014/main" id="{8A3EDEF0-D8DE-3318-119E-A7038743EC18}"/>
-              </a:ext>
-            </a:extLst>
-          </p:cNvPr>
-          <p:cNvPicPr>
-            <a:picLocks noChangeAspect="1"/>
-          </p:cNvPicPr>
-          <p:nvPr/>
-        </p:nvPicPr>
-        <p:blipFill>
-          <a:blip r:embed="rId2">
-            <a:extLst>
-              <a:ext uri="{28A0092B-C50C-407E-A947-70E740481C1C}">
-                <a14:useLocalDpi xmlns:a14="http://schemas.microsoft.com/office/drawing/2010/main" val="0"/>
-              </a:ext>
-            </a:extLst>
-          </a:blip>
-          <a:stretch>
-            <a:fillRect/>
-          </a:stretch>
-        </p:blipFill>
-        <p:spPr>
-          <a:xfrm>
-            <a:off x="233362" y="4576348"/>
-            <a:ext cx="11725275" cy="885825"/>
-          </a:xfrm>
-          <a:prstGeom prst="rect">
-            <a:avLst/>
-          </a:prstGeom>
-        </p:spPr>
-      </p:pic>
     </p:spTree>
     <p:extLst>
       <p:ext uri="{BB962C8B-B14F-4D97-AF65-F5344CB8AC3E}">
-        <p14:creationId xmlns:p14="http://schemas.microsoft.com/office/powerpoint/2010/main" val="588382975"/>
+        <p14:creationId xmlns:p14="http://schemas.microsoft.com/office/powerpoint/2010/main" val="225397121"/>
       </p:ext>
     </p:extLst>
   </p:cSld>
